--- a/Project_Sentinel_Presentation.pptx
+++ b/Project_Sentinel_Presentation.pptx
@@ -6259,8 +6259,8 @@
         </p:nvSpPr>
         <p:spPr>
           <a:xfrm>
-            <a:off x="457200" y="1371600"/>
-            <a:ext cx="1965960" cy="1051560"/>
+            <a:off x="274320" y="1371600"/>
+            <a:ext cx="1325880" cy="1051560"/>
           </a:xfrm>
           <a:prstGeom prst="roundRect">
             <a:avLst>
@@ -6293,8 +6293,8 @@
         </p:nvSpPr>
         <p:spPr>
           <a:xfrm>
-            <a:off x="548640" y="1463040"/>
-            <a:ext cx="1783080" cy="365760"/>
+            <a:off x="347472" y="1444752"/>
+            <a:ext cx="1188720" cy="365760"/>
           </a:xfrm>
           <a:prstGeom prst="rect">
             <a:avLst/>
@@ -6310,7 +6310,7 @@
               <a:buNone/>
             </a:pPr>
             <a:r>
-              <a:rPr lang="en-US" sz="1300" b="1" dirty="0">
+              <a:rPr lang="en-US" sz="1000" b="1" dirty="0">
                 <a:solidFill>
                   <a:srgbClr val="1E3161"/>
                 </a:solidFill>
@@ -6320,7 +6320,7 @@
               </a:rPr>
               <a:t>AI Extraction</a:t>
             </a:r>
-            <a:endParaRPr lang="en-US" sz="1300" dirty="0"/>
+            <a:endParaRPr lang="en-US" sz="1000" dirty="0"/>
           </a:p>
         </p:txBody>
       </p:sp>
@@ -6332,8 +6332,8 @@
         </p:nvSpPr>
         <p:spPr>
           <a:xfrm>
-            <a:off x="548640" y="1828800"/>
-            <a:ext cx="1783080" cy="502920"/>
+            <a:off x="347472" y="1810512"/>
+            <a:ext cx="1188720" cy="548640"/>
           </a:xfrm>
           <a:prstGeom prst="rect">
             <a:avLst/>
@@ -6349,7 +6349,7 @@
               <a:buNone/>
             </a:pPr>
             <a:r>
-              <a:rPr lang="en-US" sz="1000" dirty="0">
+              <a:rPr lang="en-US" sz="800" dirty="0">
                 <a:solidFill>
                   <a:srgbClr val="5A6B7F"/>
                 </a:solidFill>
@@ -6359,14 +6359,14 @@
               </a:rPr>
               <a:t>Regex + Claude API</a:t>
             </a:r>
-            <a:endParaRPr lang="en-US" sz="1000" dirty="0"/>
+            <a:endParaRPr lang="en-US" sz="800" dirty="0"/>
           </a:p>
           <a:p>
             <a:pPr indent="0" marL="0">
               <a:buNone/>
             </a:pPr>
             <a:r>
-              <a:rPr lang="en-US" sz="1000" dirty="0">
+              <a:rPr lang="en-US" sz="800" dirty="0">
                 <a:solidFill>
                   <a:srgbClr val="5A6B7F"/>
                 </a:solidFill>
@@ -6376,7 +6376,7 @@
               </a:rPr>
               <a:t>dual-mode parsing</a:t>
             </a:r>
-            <a:endParaRPr lang="en-US" sz="1000" dirty="0"/>
+            <a:endParaRPr lang="en-US" sz="800" dirty="0"/>
           </a:p>
         </p:txBody>
       </p:sp>
@@ -6388,8 +6388,8 @@
         </p:nvSpPr>
         <p:spPr>
           <a:xfrm>
-            <a:off x="2606040" y="1371600"/>
-            <a:ext cx="1965960" cy="1051560"/>
+            <a:off x="1737360" y="1371600"/>
+            <a:ext cx="1325880" cy="1051560"/>
           </a:xfrm>
           <a:prstGeom prst="roundRect">
             <a:avLst>
@@ -6422,8 +6422,8 @@
         </p:nvSpPr>
         <p:spPr>
           <a:xfrm>
-            <a:off x="2697480" y="1463040"/>
-            <a:ext cx="1783080" cy="365760"/>
+            <a:off x="1810512" y="1444752"/>
+            <a:ext cx="1188720" cy="365760"/>
           </a:xfrm>
           <a:prstGeom prst="rect">
             <a:avLst/>
@@ -6439,7 +6439,7 @@
               <a:buNone/>
             </a:pPr>
             <a:r>
-              <a:rPr lang="en-US" sz="1300" b="1" dirty="0">
+              <a:rPr lang="en-US" sz="1000" b="1" dirty="0">
                 <a:solidFill>
                   <a:srgbClr val="1E3161"/>
                 </a:solidFill>
@@ -6449,7 +6449,7 @@
               </a:rPr>
               <a:t>Batch Upload</a:t>
             </a:r>
-            <a:endParaRPr lang="en-US" sz="1300" dirty="0"/>
+            <a:endParaRPr lang="en-US" sz="1000" dirty="0"/>
           </a:p>
         </p:txBody>
       </p:sp>
@@ -6461,8 +6461,8 @@
         </p:nvSpPr>
         <p:spPr>
           <a:xfrm>
-            <a:off x="2697480" y="1828800"/>
-            <a:ext cx="1783080" cy="502920"/>
+            <a:off x="1810512" y="1810512"/>
+            <a:ext cx="1188720" cy="548640"/>
           </a:xfrm>
           <a:prstGeom prst="rect">
             <a:avLst/>
@@ -6478,7 +6478,7 @@
               <a:buNone/>
             </a:pPr>
             <a:r>
-              <a:rPr lang="en-US" sz="1000" dirty="0">
+              <a:rPr lang="en-US" sz="800" dirty="0">
                 <a:solidFill>
                   <a:srgbClr val="5A6B7F"/>
                 </a:solidFill>
@@ -6488,14 +6488,14 @@
               </a:rPr>
               <a:t>Process 10-20 PDFs</a:t>
             </a:r>
-            <a:endParaRPr lang="en-US" sz="1000" dirty="0"/>
+            <a:endParaRPr lang="en-US" sz="800" dirty="0"/>
           </a:p>
           <a:p>
             <a:pPr indent="0" marL="0">
               <a:buNone/>
             </a:pPr>
             <a:r>
-              <a:rPr lang="en-US" sz="1000" dirty="0">
+              <a:rPr lang="en-US" sz="800" dirty="0">
                 <a:solidFill>
                   <a:srgbClr val="5A6B7F"/>
                 </a:solidFill>
@@ -6505,7 +6505,7 @@
               </a:rPr>
               <a:t>at once</a:t>
             </a:r>
-            <a:endParaRPr lang="en-US" sz="1000" dirty="0"/>
+            <a:endParaRPr lang="en-US" sz="800" dirty="0"/>
           </a:p>
         </p:txBody>
       </p:sp>
@@ -6517,8 +6517,8 @@
         </p:nvSpPr>
         <p:spPr>
           <a:xfrm>
-            <a:off x="4754880" y="1371600"/>
-            <a:ext cx="1965960" cy="1051560"/>
+            <a:off x="3200400" y="1371600"/>
+            <a:ext cx="1325880" cy="1051560"/>
           </a:xfrm>
           <a:prstGeom prst="roundRect">
             <a:avLst>
@@ -6551,8 +6551,8 @@
         </p:nvSpPr>
         <p:spPr>
           <a:xfrm>
-            <a:off x="4846320" y="1463040"/>
-            <a:ext cx="1783080" cy="365760"/>
+            <a:off x="3273552" y="1444752"/>
+            <a:ext cx="1188720" cy="365760"/>
           </a:xfrm>
           <a:prstGeom prst="rect">
             <a:avLst/>
@@ -6568,7 +6568,7 @@
               <a:buNone/>
             </a:pPr>
             <a:r>
-              <a:rPr lang="en-US" sz="1300" b="1" dirty="0">
+              <a:rPr lang="en-US" sz="1000" b="1" dirty="0">
                 <a:solidFill>
                   <a:srgbClr val="1E3161"/>
                 </a:solidFill>
@@ -6578,7 +6578,7 @@
               </a:rPr>
               <a:t>4-Eye Approval</a:t>
             </a:r>
-            <a:endParaRPr lang="en-US" sz="1300" dirty="0"/>
+            <a:endParaRPr lang="en-US" sz="1000" dirty="0"/>
           </a:p>
         </p:txBody>
       </p:sp>
@@ -6590,8 +6590,8 @@
         </p:nvSpPr>
         <p:spPr>
           <a:xfrm>
-            <a:off x="4846320" y="1828800"/>
-            <a:ext cx="1783080" cy="502920"/>
+            <a:off x="3273552" y="1810512"/>
+            <a:ext cx="1188720" cy="548640"/>
           </a:xfrm>
           <a:prstGeom prst="rect">
             <a:avLst/>
@@ -6607,7 +6607,7 @@
               <a:buNone/>
             </a:pPr>
             <a:r>
-              <a:rPr lang="en-US" sz="1000" dirty="0">
+              <a:rPr lang="en-US" sz="800" dirty="0">
                 <a:solidFill>
                   <a:srgbClr val="5A6B7F"/>
                 </a:solidFill>
@@ -6617,14 +6617,14 @@
               </a:rPr>
               <a:t>Role-based with</a:t>
             </a:r>
-            <a:endParaRPr lang="en-US" sz="1000" dirty="0"/>
+            <a:endParaRPr lang="en-US" sz="800" dirty="0"/>
           </a:p>
           <a:p>
             <a:pPr indent="0" marL="0">
               <a:buNone/>
             </a:pPr>
             <a:r>
-              <a:rPr lang="en-US" sz="1000" dirty="0">
+              <a:rPr lang="en-US" sz="800" dirty="0">
                 <a:solidFill>
                   <a:srgbClr val="5A6B7F"/>
                 </a:solidFill>
@@ -6634,7 +6634,7 @@
               </a:rPr>
               <a:t>2-step confirmation</a:t>
             </a:r>
-            <a:endParaRPr lang="en-US" sz="1000" dirty="0"/>
+            <a:endParaRPr lang="en-US" sz="800" dirty="0"/>
           </a:p>
         </p:txBody>
       </p:sp>
@@ -6646,8 +6646,8 @@
         </p:nvSpPr>
         <p:spPr>
           <a:xfrm>
-            <a:off x="6903720" y="1371600"/>
-            <a:ext cx="1965960" cy="1051560"/>
+            <a:off x="4663440" y="1371600"/>
+            <a:ext cx="1325880" cy="1051560"/>
           </a:xfrm>
           <a:prstGeom prst="roundRect">
             <a:avLst>
@@ -6680,8 +6680,8 @@
         </p:nvSpPr>
         <p:spPr>
           <a:xfrm>
-            <a:off x="6995160" y="1463040"/>
-            <a:ext cx="1783080" cy="365760"/>
+            <a:off x="4736592" y="1444752"/>
+            <a:ext cx="1188720" cy="365760"/>
           </a:xfrm>
           <a:prstGeom prst="rect">
             <a:avLst/>
@@ -6697,7 +6697,7 @@
               <a:buNone/>
             </a:pPr>
             <a:r>
-              <a:rPr lang="en-US" sz="1300" b="1" dirty="0">
+              <a:rPr lang="en-US" sz="1000" b="1" dirty="0">
                 <a:solidFill>
                   <a:srgbClr val="1E3161"/>
                 </a:solidFill>
@@ -6705,9 +6705,9 @@
                 <a:ea typeface="Calibri" pitchFamily="34" charset="-122"/>
                 <a:cs typeface="Calibri" pitchFamily="34" charset="-120"/>
               </a:rPr>
-              <a:t>Dark / Light Mode</a:t>
-            </a:r>
-            <a:endParaRPr lang="en-US" sz="1300" dirty="0"/>
+              <a:t>ML Anomaly Detection</a:t>
+            </a:r>
+            <a:endParaRPr lang="en-US" sz="1000" dirty="0"/>
           </a:p>
         </p:txBody>
       </p:sp>
@@ -6719,8 +6719,8 @@
         </p:nvSpPr>
         <p:spPr>
           <a:xfrm>
-            <a:off x="6995160" y="1828800"/>
-            <a:ext cx="1783080" cy="502920"/>
+            <a:off x="4736592" y="1810512"/>
+            <a:ext cx="1188720" cy="548640"/>
           </a:xfrm>
           <a:prstGeom prst="rect">
             <a:avLst/>
@@ -6736,7 +6736,7 @@
               <a:buNone/>
             </a:pPr>
             <a:r>
-              <a:rPr lang="en-US" sz="1000" dirty="0">
+              <a:rPr lang="en-US" sz="800" dirty="0">
                 <a:solidFill>
                   <a:srgbClr val="5A6B7F"/>
                 </a:solidFill>
@@ -6744,16 +6744,128 @@
                 <a:ea typeface="Calibri" pitchFamily="34" charset="-122"/>
                 <a:cs typeface="Calibri" pitchFamily="34" charset="-120"/>
               </a:rPr>
-              <a:t>Full theme support</a:t>
+              <a:t>Z-score amount,</a:t>
+            </a:r>
+            <a:endParaRPr lang="en-US" sz="800" dirty="0"/>
+          </a:p>
+          <a:p>
+            <a:pPr indent="0" marL="0">
+              <a:buNone/>
+            </a:pPr>
+            <a:r>
+              <a:rPr lang="en-US" sz="800" dirty="0">
+                <a:solidFill>
+                  <a:srgbClr val="5A6B7F"/>
+                </a:solidFill>
+                <a:latin typeface="Calibri" pitchFamily="34" charset="0"/>
+                <a:ea typeface="Calibri" pitchFamily="34" charset="-122"/>
+                <a:cs typeface="Calibri" pitchFamily="34" charset="-120"/>
+              </a:rPr>
+              <a:t>timing, frequency</a:t>
+            </a:r>
+            <a:endParaRPr lang="en-US" sz="800" dirty="0"/>
+          </a:p>
+        </p:txBody>
+      </p:sp>
+      <p:sp>
+        <p:nvSpPr>
+          <p:cNvPr id="16" name="Shape 14"/>
+          <p:cNvSpPr/>
+          <p:nvPr/>
+        </p:nvSpPr>
+        <p:spPr>
+          <a:xfrm>
+            <a:off x="6126480" y="1371600"/>
+            <a:ext cx="1325880" cy="1051560"/>
+          </a:xfrm>
+          <a:prstGeom prst="roundRect">
+            <a:avLst>
+              <a:gd name="adj" fmla="val 6957"/>
+            </a:avLst>
+          </a:prstGeom>
+          <a:solidFill>
+            <a:srgbClr val="FFFFFF"/>
+          </a:solidFill>
+          <a:ln w="6350">
+            <a:solidFill>
+              <a:srgbClr val="E0E0E0"/>
+            </a:solidFill>
+            <a:prstDash val="solid"/>
+          </a:ln>
+          <a:effectLst>
+            <a:outerShdw sx="100000" sy="100000" kx="0" ky="0" algn="bl" rotWithShape="0" blurRad="50800" dist="12700" dir="8100000">
+              <a:srgbClr val="000000">
+                <a:alpha val="8000"/>
+              </a:srgbClr>
+            </a:outerShdw>
+          </a:effectLst>
+        </p:spPr>
+      </p:sp>
+      <p:sp>
+        <p:nvSpPr>
+          <p:cNvPr id="17" name="Text 15"/>
+          <p:cNvSpPr/>
+          <p:nvPr/>
+        </p:nvSpPr>
+        <p:spPr>
+          <a:xfrm>
+            <a:off x="6199632" y="1444752"/>
+            <a:ext cx="1188720" cy="365760"/>
+          </a:xfrm>
+          <a:prstGeom prst="rect">
+            <a:avLst/>
+          </a:prstGeom>
+          <a:noFill/>
+          <a:ln/>
+        </p:spPr>
+        <p:txBody>
+          <a:bodyPr wrap="square" lIns="0" tIns="0" rIns="0" bIns="0" rtlCol="0" anchor="ctr"/>
+          <a:lstStyle/>
+          <a:p>
+            <a:pPr indent="0" marL="0">
+              <a:buNone/>
+            </a:pPr>
+            <a:r>
+              <a:rPr lang="en-US" sz="1000" b="1" dirty="0">
+                <a:solidFill>
+                  <a:srgbClr val="1E3161"/>
+                </a:solidFill>
+                <a:latin typeface="Calibri" pitchFamily="34" charset="0"/>
+                <a:ea typeface="Calibri" pitchFamily="34" charset="-122"/>
+                <a:cs typeface="Calibri" pitchFamily="34" charset="-120"/>
+              </a:rPr>
+              <a:t>Wire Management</a:t>
             </a:r>
             <a:endParaRPr lang="en-US" sz="1000" dirty="0"/>
           </a:p>
+        </p:txBody>
+      </p:sp>
+      <p:sp>
+        <p:nvSpPr>
+          <p:cNvPr id="18" name="Text 16"/>
+          <p:cNvSpPr/>
+          <p:nvPr/>
+        </p:nvSpPr>
+        <p:spPr>
+          <a:xfrm>
+            <a:off x="6199632" y="1810512"/>
+            <a:ext cx="1188720" cy="548640"/>
+          </a:xfrm>
+          <a:prstGeom prst="rect">
+            <a:avLst/>
+          </a:prstGeom>
+          <a:noFill/>
+          <a:ln/>
+        </p:spPr>
+        <p:txBody>
+          <a:bodyPr wrap="square" lIns="0" tIns="0" rIns="0" bIns="0" rtlCol="0" anchor="ctr"/>
+          <a:lstStyle/>
           <a:p>
             <a:pPr indent="0" marL="0">
               <a:buNone/>
             </a:pPr>
             <a:r>
-              <a:rPr lang="en-US" sz="1000" dirty="0">
+              <a:rPr lang="en-US" sz="800" dirty="0">
                 <a:solidFill>
                   <a:srgbClr val="5A6B7F"/>
                 </a:solidFill>
@@ -6761,7 +6873,97 @@
                 <a:ea typeface="Calibri" pitchFamily="34" charset="-122"/>
                 <a:cs typeface="Calibri" pitchFamily="34" charset="-120"/>
               </a:rPr>
-              <a:t>across all pages</a:t>
+              <a:t>Dual-auth workflow</a:t>
+            </a:r>
+            <a:endParaRPr lang="en-US" sz="800" dirty="0"/>
+          </a:p>
+          <a:p>
+            <a:pPr indent="0" marL="0">
+              <a:buNone/>
+            </a:pPr>
+            <a:r>
+              <a:rPr lang="en-US" sz="800" dirty="0">
+                <a:solidFill>
+                  <a:srgbClr val="5A6B7F"/>
+                </a:solidFill>
+                <a:latin typeface="Calibri" pitchFamily="34" charset="0"/>
+                <a:ea typeface="Calibri" pitchFamily="34" charset="-122"/>
+                <a:cs typeface="Calibri" pitchFamily="34" charset="-120"/>
+              </a:rPr>
+              <a:t>for banking changes</a:t>
+            </a:r>
+            <a:endParaRPr lang="en-US" sz="800" dirty="0"/>
+          </a:p>
+        </p:txBody>
+      </p:sp>
+      <p:sp>
+        <p:nvSpPr>
+          <p:cNvPr id="19" name="Shape 17"/>
+          <p:cNvSpPr/>
+          <p:nvPr/>
+        </p:nvSpPr>
+        <p:spPr>
+          <a:xfrm>
+            <a:off x="7589520" y="1371600"/>
+            <a:ext cx="1325880" cy="1051560"/>
+          </a:xfrm>
+          <a:prstGeom prst="roundRect">
+            <a:avLst>
+              <a:gd name="adj" fmla="val 6957"/>
+            </a:avLst>
+          </a:prstGeom>
+          <a:solidFill>
+            <a:srgbClr val="FFFFFF"/>
+          </a:solidFill>
+          <a:ln w="6350">
+            <a:solidFill>
+              <a:srgbClr val="E0E0E0"/>
+            </a:solidFill>
+            <a:prstDash val="solid"/>
+          </a:ln>
+          <a:effectLst>
+            <a:outerShdw sx="100000" sy="100000" kx="0" ky="0" algn="bl" rotWithShape="0" blurRad="50800" dist="12700" dir="8100000">
+              <a:srgbClr val="000000">
+                <a:alpha val="8000"/>
+              </a:srgbClr>
+            </a:outerShdw>
+          </a:effectLst>
+        </p:spPr>
+      </p:sp>
+      <p:sp>
+        <p:nvSpPr>
+          <p:cNvPr id="20" name="Text 18"/>
+          <p:cNvSpPr/>
+          <p:nvPr/>
+        </p:nvSpPr>
+        <p:spPr>
+          <a:xfrm>
+            <a:off x="7662672" y="1444752"/>
+            <a:ext cx="1188720" cy="365760"/>
+          </a:xfrm>
+          <a:prstGeom prst="rect">
+            <a:avLst/>
+          </a:prstGeom>
+          <a:noFill/>
+          <a:ln/>
+        </p:spPr>
+        <p:txBody>
+          <a:bodyPr wrap="square" lIns="0" tIns="0" rIns="0" bIns="0" rtlCol="0" anchor="ctr"/>
+          <a:lstStyle/>
+          <a:p>
+            <a:pPr indent="0" marL="0">
+              <a:buNone/>
+            </a:pPr>
+            <a:r>
+              <a:rPr lang="en-US" sz="1000" b="1" dirty="0">
+                <a:solidFill>
+                  <a:srgbClr val="1E3161"/>
+                </a:solidFill>
+                <a:latin typeface="Calibri" pitchFamily="34" charset="0"/>
+                <a:ea typeface="Calibri" pitchFamily="34" charset="-122"/>
+                <a:cs typeface="Calibri" pitchFamily="34" charset="-120"/>
+              </a:rPr>
+              <a:t>Commitment Amend</a:t>
             </a:r>
             <a:endParaRPr lang="en-US" sz="1000" dirty="0"/>
           </a:p>
@@ -6769,14 +6971,70 @@
       </p:sp>
       <p:sp>
         <p:nvSpPr>
-          <p:cNvPr id="16" name="Shape 14"/>
-          <p:cNvSpPr/>
-          <p:nvPr/>
-        </p:nvSpPr>
-        <p:spPr>
-          <a:xfrm>
-            <a:off x="457200" y="2606040"/>
-            <a:ext cx="1965960" cy="1051560"/>
+          <p:cNvPr id="21" name="Text 19"/>
+          <p:cNvSpPr/>
+          <p:nvPr/>
+        </p:nvSpPr>
+        <p:spPr>
+          <a:xfrm>
+            <a:off x="7662672" y="1810512"/>
+            <a:ext cx="1188720" cy="548640"/>
+          </a:xfrm>
+          <a:prstGeom prst="rect">
+            <a:avLst/>
+          </a:prstGeom>
+          <a:noFill/>
+          <a:ln/>
+        </p:spPr>
+        <p:txBody>
+          <a:bodyPr wrap="square" lIns="0" tIns="0" rIns="0" bIns="0" rtlCol="0" anchor="ctr"/>
+          <a:lstStyle/>
+          <a:p>
+            <a:pPr indent="0" marL="0">
+              <a:buNone/>
+            </a:pPr>
+            <a:r>
+              <a:rPr lang="en-US" sz="800" dirty="0">
+                <a:solidFill>
+                  <a:srgbClr val="5A6B7F"/>
+                </a:solidFill>
+                <a:latin typeface="Calibri" pitchFamily="34" charset="0"/>
+                <a:ea typeface="Calibri" pitchFamily="34" charset="-122"/>
+                <a:cs typeface="Calibri" pitchFamily="34" charset="-120"/>
+              </a:rPr>
+              <a:t>Formal increase</a:t>
+            </a:r>
+            <a:endParaRPr lang="en-US" sz="800" dirty="0"/>
+          </a:p>
+          <a:p>
+            <a:pPr indent="0" marL="0">
+              <a:buNone/>
+            </a:pPr>
+            <a:r>
+              <a:rPr lang="en-US" sz="800" dirty="0">
+                <a:solidFill>
+                  <a:srgbClr val="5A6B7F"/>
+                </a:solidFill>
+                <a:latin typeface="Calibri" pitchFamily="34" charset="0"/>
+                <a:ea typeface="Calibri" pitchFamily="34" charset="-122"/>
+                <a:cs typeface="Calibri" pitchFamily="34" charset="-120"/>
+              </a:rPr>
+              <a:t>request workflow</a:t>
+            </a:r>
+            <a:endParaRPr lang="en-US" sz="800" dirty="0"/>
+          </a:p>
+        </p:txBody>
+      </p:sp>
+      <p:sp>
+        <p:nvSpPr>
+          <p:cNvPr id="22" name="Shape 20"/>
+          <p:cNvSpPr/>
+          <p:nvPr/>
+        </p:nvSpPr>
+        <p:spPr>
+          <a:xfrm>
+            <a:off x="274320" y="2606040"/>
+            <a:ext cx="1325880" cy="1051560"/>
           </a:xfrm>
           <a:prstGeom prst="roundRect">
             <a:avLst>
@@ -6803,14 +7061,14 @@
       </p:sp>
       <p:sp>
         <p:nvSpPr>
-          <p:cNvPr id="17" name="Text 15"/>
-          <p:cNvSpPr/>
-          <p:nvPr/>
-        </p:nvSpPr>
-        <p:spPr>
-          <a:xfrm>
-            <a:off x="548640" y="2697480"/>
-            <a:ext cx="1783080" cy="365760"/>
+          <p:cNvPr id="23" name="Text 21"/>
+          <p:cNvSpPr/>
+          <p:nvPr/>
+        </p:nvSpPr>
+        <p:spPr>
+          <a:xfrm>
+            <a:off x="347472" y="2679192"/>
+            <a:ext cx="1188720" cy="365760"/>
           </a:xfrm>
           <a:prstGeom prst="rect">
             <a:avLst/>
@@ -6826,7 +7084,7 @@
               <a:buNone/>
             </a:pPr>
             <a:r>
-              <a:rPr lang="en-US" sz="1300" b="1" dirty="0">
+              <a:rPr lang="en-US" sz="1000" b="1" dirty="0">
                 <a:solidFill>
                   <a:srgbClr val="1E3161"/>
                 </a:solidFill>
@@ -6834,22 +7092,22 @@
                 <a:ea typeface="Calibri" pitchFamily="34" charset="-122"/>
                 <a:cs typeface="Calibri" pitchFamily="34" charset="-120"/>
               </a:rPr>
-              <a:t>Wire Management</a:t>
-            </a:r>
-            <a:endParaRPr lang="en-US" sz="1300" dirty="0"/>
-          </a:p>
-        </p:txBody>
-      </p:sp>
-      <p:sp>
-        <p:nvSpPr>
-          <p:cNvPr id="18" name="Text 16"/>
-          <p:cNvSpPr/>
-          <p:nvPr/>
-        </p:nvSpPr>
-        <p:spPr>
-          <a:xfrm>
-            <a:off x="548640" y="3063240"/>
-            <a:ext cx="1783080" cy="502920"/>
+              <a:t>Cash Forecasting</a:t>
+            </a:r>
+            <a:endParaRPr lang="en-US" sz="1000" dirty="0"/>
+          </a:p>
+        </p:txBody>
+      </p:sp>
+      <p:sp>
+        <p:nvSpPr>
+          <p:cNvPr id="24" name="Text 22"/>
+          <p:cNvSpPr/>
+          <p:nvPr/>
+        </p:nvSpPr>
+        <p:spPr>
+          <a:xfrm>
+            <a:off x="347472" y="3044952"/>
+            <a:ext cx="1188720" cy="548640"/>
           </a:xfrm>
           <a:prstGeom prst="rect">
             <a:avLst/>
@@ -6865,7 +7123,7 @@
               <a:buNone/>
             </a:pPr>
             <a:r>
-              <a:rPr lang="en-US" sz="1000" dirty="0">
+              <a:rPr lang="en-US" sz="800" dirty="0">
                 <a:solidFill>
                   <a:srgbClr val="5A6B7F"/>
                 </a:solidFill>
@@ -6873,16 +7131,16 @@
                 <a:ea typeface="Calibri" pitchFamily="34" charset="-122"/>
                 <a:cs typeface="Calibri" pitchFamily="34" charset="-120"/>
               </a:rPr>
-              <a:t>Dual-auth workflow</a:t>
-            </a:r>
-            <a:endParaRPr lang="en-US" sz="1000" dirty="0"/>
+              <a:t>12-month projection</a:t>
+            </a:r>
+            <a:endParaRPr lang="en-US" sz="800" dirty="0"/>
           </a:p>
           <a:p>
             <a:pPr indent="0" marL="0">
               <a:buNone/>
             </a:pPr>
             <a:r>
-              <a:rPr lang="en-US" sz="1000" dirty="0">
+              <a:rPr lang="en-US" sz="800" dirty="0">
                 <a:solidFill>
                   <a:srgbClr val="5A6B7F"/>
                 </a:solidFill>
@@ -6890,22 +7148,22 @@
                 <a:ea typeface="Calibri" pitchFamily="34" charset="-122"/>
                 <a:cs typeface="Calibri" pitchFamily="34" charset="-120"/>
               </a:rPr>
-              <a:t>for banking changes</a:t>
-            </a:r>
-            <a:endParaRPr lang="en-US" sz="1000" dirty="0"/>
-          </a:p>
-        </p:txBody>
-      </p:sp>
-      <p:sp>
-        <p:nvSpPr>
-          <p:cNvPr id="19" name="Shape 17"/>
-          <p:cNvSpPr/>
-          <p:nvPr/>
-        </p:nvSpPr>
-        <p:spPr>
-          <a:xfrm>
-            <a:off x="2606040" y="2606040"/>
-            <a:ext cx="1965960" cy="1051560"/>
+              <a:t>confidence bands</a:t>
+            </a:r>
+            <a:endParaRPr lang="en-US" sz="800" dirty="0"/>
+          </a:p>
+        </p:txBody>
+      </p:sp>
+      <p:sp>
+        <p:nvSpPr>
+          <p:cNvPr id="25" name="Shape 23"/>
+          <p:cNvSpPr/>
+          <p:nvPr/>
+        </p:nvSpPr>
+        <p:spPr>
+          <a:xfrm>
+            <a:off x="1737360" y="2606040"/>
+            <a:ext cx="1325880" cy="1051560"/>
           </a:xfrm>
           <a:prstGeom prst="roundRect">
             <a:avLst>
@@ -6932,14 +7190,14 @@
       </p:sp>
       <p:sp>
         <p:nvSpPr>
-          <p:cNvPr id="20" name="Text 18"/>
-          <p:cNvSpPr/>
-          <p:nvPr/>
-        </p:nvSpPr>
-        <p:spPr>
-          <a:xfrm>
-            <a:off x="2697480" y="2697480"/>
-            <a:ext cx="1783080" cy="365760"/>
+          <p:cNvPr id="26" name="Text 24"/>
+          <p:cNvSpPr/>
+          <p:nvPr/>
+        </p:nvSpPr>
+        <p:spPr>
+          <a:xfrm>
+            <a:off x="1810512" y="2679192"/>
+            <a:ext cx="1188720" cy="365760"/>
           </a:xfrm>
           <a:prstGeom prst="rect">
             <a:avLst/>
@@ -6955,7 +7213,7 @@
               <a:buNone/>
             </a:pPr>
             <a:r>
-              <a:rPr lang="en-US" sz="1300" b="1" dirty="0">
+              <a:rPr lang="en-US" sz="1000" b="1" dirty="0">
                 <a:solidFill>
                   <a:srgbClr val="1E3161"/>
                 </a:solidFill>
@@ -6963,22 +7221,22 @@
                 <a:ea typeface="Calibri" pitchFamily="34" charset="-122"/>
                 <a:cs typeface="Calibri" pitchFamily="34" charset="-120"/>
               </a:rPr>
-              <a:t>Commitment Amend</a:t>
-            </a:r>
-            <a:endParaRPr lang="en-US" sz="1300" dirty="0"/>
-          </a:p>
-        </p:txBody>
-      </p:sp>
-      <p:sp>
-        <p:nvSpPr>
-          <p:cNvPr id="21" name="Text 19"/>
-          <p:cNvSpPr/>
-          <p:nvPr/>
-        </p:nvSpPr>
-        <p:spPr>
-          <a:xfrm>
-            <a:off x="2697480" y="3063240"/>
-            <a:ext cx="1783080" cy="502920"/>
+              <a:t>Audit PDF Export</a:t>
+            </a:r>
+            <a:endParaRPr lang="en-US" sz="1000" dirty="0"/>
+          </a:p>
+        </p:txBody>
+      </p:sp>
+      <p:sp>
+        <p:nvSpPr>
+          <p:cNvPr id="27" name="Text 25"/>
+          <p:cNvSpPr/>
+          <p:nvPr/>
+        </p:nvSpPr>
+        <p:spPr>
+          <a:xfrm>
+            <a:off x="1810512" y="3044952"/>
+            <a:ext cx="1188720" cy="548640"/>
           </a:xfrm>
           <a:prstGeom prst="rect">
             <a:avLst/>
@@ -6994,7 +7252,7 @@
               <a:buNone/>
             </a:pPr>
             <a:r>
-              <a:rPr lang="en-US" sz="1000" dirty="0">
+              <a:rPr lang="en-US" sz="800" dirty="0">
                 <a:solidFill>
                   <a:srgbClr val="5A6B7F"/>
                 </a:solidFill>
@@ -7002,16 +7260,16 @@
                 <a:ea typeface="Calibri" pitchFamily="34" charset="-122"/>
                 <a:cs typeface="Calibri" pitchFamily="34" charset="-120"/>
               </a:rPr>
-              <a:t>Formal increase</a:t>
-            </a:r>
-            <a:endParaRPr lang="en-US" sz="1000" dirty="0"/>
+              <a:t>Regulatory report</a:t>
+            </a:r>
+            <a:endParaRPr lang="en-US" sz="800" dirty="0"/>
           </a:p>
           <a:p>
             <a:pPr indent="0" marL="0">
               <a:buNone/>
             </a:pPr>
             <a:r>
-              <a:rPr lang="en-US" sz="1000" dirty="0">
+              <a:rPr lang="en-US" sz="800" dirty="0">
                 <a:solidFill>
                   <a:srgbClr val="5A6B7F"/>
                 </a:solidFill>
@@ -7019,22 +7277,22 @@
                 <a:ea typeface="Calibri" pitchFamily="34" charset="-122"/>
                 <a:cs typeface="Calibri" pitchFamily="34" charset="-120"/>
               </a:rPr>
-              <a:t>request workflow</a:t>
-            </a:r>
-            <a:endParaRPr lang="en-US" sz="1000" dirty="0"/>
-          </a:p>
-        </p:txBody>
-      </p:sp>
-      <p:sp>
-        <p:nvSpPr>
-          <p:cNvPr id="22" name="Shape 20"/>
-          <p:cNvSpPr/>
-          <p:nvPr/>
-        </p:nvSpPr>
-        <p:spPr>
-          <a:xfrm>
-            <a:off x="4754880" y="2606040"/>
-            <a:ext cx="1965960" cy="1051560"/>
+              <a:t>for external auditors</a:t>
+            </a:r>
+            <a:endParaRPr lang="en-US" sz="800" dirty="0"/>
+          </a:p>
+        </p:txBody>
+      </p:sp>
+      <p:sp>
+        <p:nvSpPr>
+          <p:cNvPr id="28" name="Shape 26"/>
+          <p:cNvSpPr/>
+          <p:nvPr/>
+        </p:nvSpPr>
+        <p:spPr>
+          <a:xfrm>
+            <a:off x="3200400" y="2606040"/>
+            <a:ext cx="1325880" cy="1051560"/>
           </a:xfrm>
           <a:prstGeom prst="roundRect">
             <a:avLst>
@@ -7061,14 +7319,14 @@
       </p:sp>
       <p:sp>
         <p:nvSpPr>
-          <p:cNvPr id="23" name="Text 21"/>
-          <p:cNvSpPr/>
-          <p:nvPr/>
-        </p:nvSpPr>
-        <p:spPr>
-          <a:xfrm>
-            <a:off x="4846320" y="2697480"/>
-            <a:ext cx="1783080" cy="365760"/>
+          <p:cNvPr id="29" name="Text 27"/>
+          <p:cNvSpPr/>
+          <p:nvPr/>
+        </p:nvSpPr>
+        <p:spPr>
+          <a:xfrm>
+            <a:off x="3273552" y="2679192"/>
+            <a:ext cx="1188720" cy="365760"/>
           </a:xfrm>
           <a:prstGeom prst="rect">
             <a:avLst/>
@@ -7084,7 +7342,7 @@
               <a:buNone/>
             </a:pPr>
             <a:r>
-              <a:rPr lang="en-US" sz="1300" b="1" dirty="0">
+              <a:rPr lang="en-US" sz="1000" b="1" dirty="0">
                 <a:solidFill>
                   <a:srgbClr val="1E3161"/>
                 </a:solidFill>
@@ -7092,22 +7350,22 @@
                 <a:ea typeface="Calibri" pitchFamily="34" charset="-122"/>
                 <a:cs typeface="Calibri" pitchFamily="34" charset="-120"/>
               </a:rPr>
-              <a:t>Portfolio Metrics</a:t>
-            </a:r>
-            <a:endParaRPr lang="en-US" sz="1300" dirty="0"/>
-          </a:p>
-        </p:txBody>
-      </p:sp>
-      <p:sp>
-        <p:nvSpPr>
-          <p:cNvPr id="24" name="Text 22"/>
-          <p:cNvSpPr/>
-          <p:nvPr/>
-        </p:nvSpPr>
-        <p:spPr>
-          <a:xfrm>
-            <a:off x="4846320" y="3063240"/>
-            <a:ext cx="1783080" cy="502920"/>
+              <a:t>Multi-Language</a:t>
+            </a:r>
+            <a:endParaRPr lang="en-US" sz="1000" dirty="0"/>
+          </a:p>
+        </p:txBody>
+      </p:sp>
+      <p:sp>
+        <p:nvSpPr>
+          <p:cNvPr id="30" name="Text 28"/>
+          <p:cNvSpPr/>
+          <p:nvPr/>
+        </p:nvSpPr>
+        <p:spPr>
+          <a:xfrm>
+            <a:off x="3273552" y="3044952"/>
+            <a:ext cx="1188720" cy="548640"/>
           </a:xfrm>
           <a:prstGeom prst="rect">
             <a:avLst/>
@@ -7123,7 +7381,7 @@
               <a:buNone/>
             </a:pPr>
             <a:r>
-              <a:rPr lang="en-US" sz="1000" dirty="0">
+              <a:rPr lang="en-US" sz="800" dirty="0">
                 <a:solidFill>
                   <a:srgbClr val="5A6B7F"/>
                 </a:solidFill>
@@ -7131,16 +7389,16 @@
                 <a:ea typeface="Calibri" pitchFamily="34" charset="-122"/>
                 <a:cs typeface="Calibri" pitchFamily="34" charset="-120"/>
               </a:rPr>
-              <a:t>TVPI / DPI tracking</a:t>
-            </a:r>
-            <a:endParaRPr lang="en-US" sz="1000" dirty="0"/>
+              <a:t>EN / DE / FR / IT / ES</a:t>
+            </a:r>
+            <a:endParaRPr lang="en-US" sz="800" dirty="0"/>
           </a:p>
           <a:p>
             <a:pPr indent="0" marL="0">
               <a:buNone/>
             </a:pPr>
             <a:r>
-              <a:rPr lang="en-US" sz="1000" dirty="0">
+              <a:rPr lang="en-US" sz="800" dirty="0">
                 <a:solidFill>
                   <a:srgbClr val="5A6B7F"/>
                 </a:solidFill>
@@ -7148,22 +7406,22 @@
                 <a:ea typeface="Calibri" pitchFamily="34" charset="-122"/>
                 <a:cs typeface="Calibri" pitchFamily="34" charset="-120"/>
               </a:rPr>
-              <a:t>with cash flows</a:t>
-            </a:r>
-            <a:endParaRPr lang="en-US" sz="1000" dirty="0"/>
-          </a:p>
-        </p:txBody>
-      </p:sp>
-      <p:sp>
-        <p:nvSpPr>
-          <p:cNvPr id="25" name="Shape 23"/>
-          <p:cNvSpPr/>
-          <p:nvPr/>
-        </p:nvSpPr>
-        <p:spPr>
-          <a:xfrm>
-            <a:off x="6903720" y="2606040"/>
-            <a:ext cx="1965960" cy="1051560"/>
+              <a:t>PDF support</a:t>
+            </a:r>
+            <a:endParaRPr lang="en-US" sz="800" dirty="0"/>
+          </a:p>
+        </p:txBody>
+      </p:sp>
+      <p:sp>
+        <p:nvSpPr>
+          <p:cNvPr id="31" name="Shape 29"/>
+          <p:cNvSpPr/>
+          <p:nvPr/>
+        </p:nvSpPr>
+        <p:spPr>
+          <a:xfrm>
+            <a:off x="4663440" y="2606040"/>
+            <a:ext cx="1325880" cy="1051560"/>
           </a:xfrm>
           <a:prstGeom prst="roundRect">
             <a:avLst>
@@ -7190,14 +7448,14 @@
       </p:sp>
       <p:sp>
         <p:nvSpPr>
-          <p:cNvPr id="26" name="Text 24"/>
-          <p:cNvSpPr/>
-          <p:nvPr/>
-        </p:nvSpPr>
-        <p:spPr>
-          <a:xfrm>
-            <a:off x="6995160" y="2697480"/>
-            <a:ext cx="1783080" cy="365760"/>
+          <p:cNvPr id="32" name="Text 30"/>
+          <p:cNvSpPr/>
+          <p:nvPr/>
+        </p:nvSpPr>
+        <p:spPr>
+          <a:xfrm>
+            <a:off x="4736592" y="2679192"/>
+            <a:ext cx="1188720" cy="365760"/>
           </a:xfrm>
           <a:prstGeom prst="rect">
             <a:avLst/>
@@ -7213,7 +7471,7 @@
               <a:buNone/>
             </a:pPr>
             <a:r>
-              <a:rPr lang="en-US" sz="1300" b="1" dirty="0">
+              <a:rPr lang="en-US" sz="1000" b="1" dirty="0">
                 <a:solidFill>
                   <a:srgbClr val="1E3161"/>
                 </a:solidFill>
@@ -7221,22 +7479,22 @@
                 <a:ea typeface="Calibri" pitchFamily="34" charset="-122"/>
                 <a:cs typeface="Calibri" pitchFamily="34" charset="-120"/>
               </a:rPr>
-              <a:t>Audit Trail</a:t>
-            </a:r>
-            <a:endParaRPr lang="en-US" sz="1300" dirty="0"/>
-          </a:p>
-        </p:txBody>
-      </p:sp>
-      <p:sp>
-        <p:nvSpPr>
-          <p:cNvPr id="27" name="Text 25"/>
-          <p:cNvSpPr/>
-          <p:nvPr/>
-        </p:nvSpPr>
-        <p:spPr>
-          <a:xfrm>
-            <a:off x="6995160" y="3063240"/>
-            <a:ext cx="1783080" cy="502920"/>
+              <a:t>Due Date Alerts</a:t>
+            </a:r>
+            <a:endParaRPr lang="en-US" sz="1000" dirty="0"/>
+          </a:p>
+        </p:txBody>
+      </p:sp>
+      <p:sp>
+        <p:nvSpPr>
+          <p:cNvPr id="33" name="Text 31"/>
+          <p:cNvSpPr/>
+          <p:nvPr/>
+        </p:nvSpPr>
+        <p:spPr>
+          <a:xfrm>
+            <a:off x="4736592" y="3044952"/>
+            <a:ext cx="1188720" cy="548640"/>
           </a:xfrm>
           <a:prstGeom prst="rect">
             <a:avLst/>
@@ -7252,7 +7510,7 @@
               <a:buNone/>
             </a:pPr>
             <a:r>
-              <a:rPr lang="en-US" sz="1000" dirty="0">
+              <a:rPr lang="en-US" sz="800" dirty="0">
                 <a:solidFill>
                   <a:srgbClr val="5A6B7F"/>
                 </a:solidFill>
@@ -7260,16 +7518,128 @@
                 <a:ea typeface="Calibri" pitchFamily="34" charset="-122"/>
                 <a:cs typeface="Calibri" pitchFamily="34" charset="-120"/>
               </a:rPr>
-              <a:t>Filter, search, export</a:t>
+              <a:t>Color-coded urgency</a:t>
+            </a:r>
+            <a:endParaRPr lang="en-US" sz="800" dirty="0"/>
+          </a:p>
+          <a:p>
+            <a:pPr indent="0" marL="0">
+              <a:buNone/>
+            </a:pPr>
+            <a:r>
+              <a:rPr lang="en-US" sz="800" dirty="0">
+                <a:solidFill>
+                  <a:srgbClr val="5A6B7F"/>
+                </a:solidFill>
+                <a:latin typeface="Calibri" pitchFamily="34" charset="0"/>
+                <a:ea typeface="Calibri" pitchFamily="34" charset="-122"/>
+                <a:cs typeface="Calibri" pitchFamily="34" charset="-120"/>
+              </a:rPr>
+              <a:t>with countdowns</a:t>
+            </a:r>
+            <a:endParaRPr lang="en-US" sz="800" dirty="0"/>
+          </a:p>
+        </p:txBody>
+      </p:sp>
+      <p:sp>
+        <p:nvSpPr>
+          <p:cNvPr id="34" name="Shape 32"/>
+          <p:cNvSpPr/>
+          <p:nvPr/>
+        </p:nvSpPr>
+        <p:spPr>
+          <a:xfrm>
+            <a:off x="6126480" y="2606040"/>
+            <a:ext cx="1325880" cy="1051560"/>
+          </a:xfrm>
+          <a:prstGeom prst="roundRect">
+            <a:avLst>
+              <a:gd name="adj" fmla="val 6957"/>
+            </a:avLst>
+          </a:prstGeom>
+          <a:solidFill>
+            <a:srgbClr val="DDE9E8"/>
+          </a:solidFill>
+          <a:ln w="6350">
+            <a:solidFill>
+              <a:srgbClr val="E0E0E0"/>
+            </a:solidFill>
+            <a:prstDash val="solid"/>
+          </a:ln>
+          <a:effectLst>
+            <a:outerShdw sx="100000" sy="100000" kx="0" ky="0" algn="bl" rotWithShape="0" blurRad="50800" dist="12700" dir="8100000">
+              <a:srgbClr val="000000">
+                <a:alpha val="8000"/>
+              </a:srgbClr>
+            </a:outerShdw>
+          </a:effectLst>
+        </p:spPr>
+      </p:sp>
+      <p:sp>
+        <p:nvSpPr>
+          <p:cNvPr id="35" name="Text 33"/>
+          <p:cNvSpPr/>
+          <p:nvPr/>
+        </p:nvSpPr>
+        <p:spPr>
+          <a:xfrm>
+            <a:off x="6199632" y="2679192"/>
+            <a:ext cx="1188720" cy="365760"/>
+          </a:xfrm>
+          <a:prstGeom prst="rect">
+            <a:avLst/>
+          </a:prstGeom>
+          <a:noFill/>
+          <a:ln/>
+        </p:spPr>
+        <p:txBody>
+          <a:bodyPr wrap="square" lIns="0" tIns="0" rIns="0" bIns="0" rtlCol="0" anchor="ctr"/>
+          <a:lstStyle/>
+          <a:p>
+            <a:pPr indent="0" marL="0">
+              <a:buNone/>
+            </a:pPr>
+            <a:r>
+              <a:rPr lang="en-US" sz="1000" b="1" dirty="0">
+                <a:solidFill>
+                  <a:srgbClr val="1E3161"/>
+                </a:solidFill>
+                <a:latin typeface="Calibri" pitchFamily="34" charset="0"/>
+                <a:ea typeface="Calibri" pitchFamily="34" charset="-122"/>
+                <a:cs typeface="Calibri" pitchFamily="34" charset="-120"/>
+              </a:rPr>
+              <a:t>Portfolio Metrics</a:t>
             </a:r>
             <a:endParaRPr lang="en-US" sz="1000" dirty="0"/>
           </a:p>
+        </p:txBody>
+      </p:sp>
+      <p:sp>
+        <p:nvSpPr>
+          <p:cNvPr id="36" name="Text 34"/>
+          <p:cNvSpPr/>
+          <p:nvPr/>
+        </p:nvSpPr>
+        <p:spPr>
+          <a:xfrm>
+            <a:off x="6199632" y="3044952"/>
+            <a:ext cx="1188720" cy="548640"/>
+          </a:xfrm>
+          <a:prstGeom prst="rect">
+            <a:avLst/>
+          </a:prstGeom>
+          <a:noFill/>
+          <a:ln/>
+        </p:spPr>
+        <p:txBody>
+          <a:bodyPr wrap="square" lIns="0" tIns="0" rIns="0" bIns="0" rtlCol="0" anchor="ctr"/>
+          <a:lstStyle/>
           <a:p>
             <a:pPr indent="0" marL="0">
               <a:buNone/>
             </a:pPr>
             <a:r>
-              <a:rPr lang="en-US" sz="1000" dirty="0">
+              <a:rPr lang="en-US" sz="800" dirty="0">
                 <a:solidFill>
                   <a:srgbClr val="5A6B7F"/>
                 </a:solidFill>
@@ -7277,7 +7647,97 @@
                 <a:ea typeface="Calibri" pitchFamily="34" charset="-122"/>
                 <a:cs typeface="Calibri" pitchFamily="34" charset="-120"/>
               </a:rPr>
-              <a:t>with PDF archive</a:t>
+              <a:t>TVPI / DPI tracking</a:t>
+            </a:r>
+            <a:endParaRPr lang="en-US" sz="800" dirty="0"/>
+          </a:p>
+          <a:p>
+            <a:pPr indent="0" marL="0">
+              <a:buNone/>
+            </a:pPr>
+            <a:r>
+              <a:rPr lang="en-US" sz="800" dirty="0">
+                <a:solidFill>
+                  <a:srgbClr val="5A6B7F"/>
+                </a:solidFill>
+                <a:latin typeface="Calibri" pitchFamily="34" charset="0"/>
+                <a:ea typeface="Calibri" pitchFamily="34" charset="-122"/>
+                <a:cs typeface="Calibri" pitchFamily="34" charset="-120"/>
+              </a:rPr>
+              <a:t>with cash flows</a:t>
+            </a:r>
+            <a:endParaRPr lang="en-US" sz="800" dirty="0"/>
+          </a:p>
+        </p:txBody>
+      </p:sp>
+      <p:sp>
+        <p:nvSpPr>
+          <p:cNvPr id="37" name="Shape 35"/>
+          <p:cNvSpPr/>
+          <p:nvPr/>
+        </p:nvSpPr>
+        <p:spPr>
+          <a:xfrm>
+            <a:off x="7589520" y="2606040"/>
+            <a:ext cx="1325880" cy="1051560"/>
+          </a:xfrm>
+          <a:prstGeom prst="roundRect">
+            <a:avLst>
+              <a:gd name="adj" fmla="val 6957"/>
+            </a:avLst>
+          </a:prstGeom>
+          <a:solidFill>
+            <a:srgbClr val="DDE9E8"/>
+          </a:solidFill>
+          <a:ln w="6350">
+            <a:solidFill>
+              <a:srgbClr val="E0E0E0"/>
+            </a:solidFill>
+            <a:prstDash val="solid"/>
+          </a:ln>
+          <a:effectLst>
+            <a:outerShdw sx="100000" sy="100000" kx="0" ky="0" algn="bl" rotWithShape="0" blurRad="50800" dist="12700" dir="8100000">
+              <a:srgbClr val="000000">
+                <a:alpha val="8000"/>
+              </a:srgbClr>
+            </a:outerShdw>
+          </a:effectLst>
+        </p:spPr>
+      </p:sp>
+      <p:sp>
+        <p:nvSpPr>
+          <p:cNvPr id="38" name="Text 36"/>
+          <p:cNvSpPr/>
+          <p:nvPr/>
+        </p:nvSpPr>
+        <p:spPr>
+          <a:xfrm>
+            <a:off x="7662672" y="2679192"/>
+            <a:ext cx="1188720" cy="365760"/>
+          </a:xfrm>
+          <a:prstGeom prst="rect">
+            <a:avLst/>
+          </a:prstGeom>
+          <a:noFill/>
+          <a:ln/>
+        </p:spPr>
+        <p:txBody>
+          <a:bodyPr wrap="square" lIns="0" tIns="0" rIns="0" bIns="0" rtlCol="0" anchor="ctr"/>
+          <a:lstStyle/>
+          <a:p>
+            <a:pPr indent="0" marL="0">
+              <a:buNone/>
+            </a:pPr>
+            <a:r>
+              <a:rPr lang="en-US" sz="1000" b="1" dirty="0">
+                <a:solidFill>
+                  <a:srgbClr val="1E3161"/>
+                </a:solidFill>
+                <a:latin typeface="Calibri" pitchFamily="34" charset="0"/>
+                <a:ea typeface="Calibri" pitchFamily="34" charset="-122"/>
+                <a:cs typeface="Calibri" pitchFamily="34" charset="-120"/>
+              </a:rPr>
+              <a:t>Duplicate Detection</a:t>
             </a:r>
             <a:endParaRPr lang="en-US" sz="1000" dirty="0"/>
           </a:p>
@@ -7285,14 +7745,70 @@
       </p:sp>
       <p:sp>
         <p:nvSpPr>
-          <p:cNvPr id="28" name="Shape 26"/>
-          <p:cNvSpPr/>
-          <p:nvPr/>
-        </p:nvSpPr>
-        <p:spPr>
-          <a:xfrm>
-            <a:off x="457200" y="3840480"/>
-            <a:ext cx="1965960" cy="1051560"/>
+          <p:cNvPr id="39" name="Text 37"/>
+          <p:cNvSpPr/>
+          <p:nvPr/>
+        </p:nvSpPr>
+        <p:spPr>
+          <a:xfrm>
+            <a:off x="7662672" y="3044952"/>
+            <a:ext cx="1188720" cy="548640"/>
+          </a:xfrm>
+          <a:prstGeom prst="rect">
+            <a:avLst/>
+          </a:prstGeom>
+          <a:noFill/>
+          <a:ln/>
+        </p:spPr>
+        <p:txBody>
+          <a:bodyPr wrap="square" lIns="0" tIns="0" rIns="0" bIns="0" rtlCol="0" anchor="ctr"/>
+          <a:lstStyle/>
+          <a:p>
+            <a:pPr indent="0" marL="0">
+              <a:buNone/>
+            </a:pPr>
+            <a:r>
+              <a:rPr lang="en-US" sz="800" dirty="0">
+                <a:solidFill>
+                  <a:srgbClr val="5A6B7F"/>
+                </a:solidFill>
+                <a:latin typeface="Calibri" pitchFamily="34" charset="0"/>
+                <a:ea typeface="Calibri" pitchFamily="34" charset="-122"/>
+                <a:cs typeface="Calibri" pitchFamily="34" charset="-120"/>
+              </a:rPr>
+              <a:t>Exact + fuzzy match</a:t>
+            </a:r>
+            <a:endParaRPr lang="en-US" sz="800" dirty="0"/>
+          </a:p>
+          <a:p>
+            <a:pPr indent="0" marL="0">
+              <a:buNone/>
+            </a:pPr>
+            <a:r>
+              <a:rPr lang="en-US" sz="800" dirty="0">
+                <a:solidFill>
+                  <a:srgbClr val="5A6B7F"/>
+                </a:solidFill>
+                <a:latin typeface="Calibri" pitchFamily="34" charset="0"/>
+                <a:ea typeface="Calibri" pitchFamily="34" charset="-122"/>
+                <a:cs typeface="Calibri" pitchFamily="34" charset="-120"/>
+              </a:rPr>
+              <a:t>with override</a:t>
+            </a:r>
+            <a:endParaRPr lang="en-US" sz="800" dirty="0"/>
+          </a:p>
+        </p:txBody>
+      </p:sp>
+      <p:sp>
+        <p:nvSpPr>
+          <p:cNvPr id="40" name="Shape 38"/>
+          <p:cNvSpPr/>
+          <p:nvPr/>
+        </p:nvSpPr>
+        <p:spPr>
+          <a:xfrm>
+            <a:off x="274320" y="3840480"/>
+            <a:ext cx="1325880" cy="1051560"/>
           </a:xfrm>
           <a:prstGeom prst="roundRect">
             <a:avLst>
@@ -7319,14 +7835,14 @@
       </p:sp>
       <p:sp>
         <p:nvSpPr>
-          <p:cNvPr id="29" name="Text 27"/>
-          <p:cNvSpPr/>
-          <p:nvPr/>
-        </p:nvSpPr>
-        <p:spPr>
-          <a:xfrm>
-            <a:off x="548640" y="3931920"/>
-            <a:ext cx="1783080" cy="365760"/>
+          <p:cNvPr id="41" name="Text 39"/>
+          <p:cNvSpPr/>
+          <p:nvPr/>
+        </p:nvSpPr>
+        <p:spPr>
+          <a:xfrm>
+            <a:off x="347472" y="3913632"/>
+            <a:ext cx="1188720" cy="365760"/>
           </a:xfrm>
           <a:prstGeom prst="rect">
             <a:avLst/>
@@ -7342,7 +7858,7 @@
               <a:buNone/>
             </a:pPr>
             <a:r>
-              <a:rPr lang="en-US" sz="1300" b="1" dirty="0">
+              <a:rPr lang="en-US" sz="1000" b="1" dirty="0">
                 <a:solidFill>
                   <a:srgbClr val="1E3161"/>
                 </a:solidFill>
@@ -7350,22 +7866,22 @@
                 <a:ea typeface="Calibri" pitchFamily="34" charset="-122"/>
                 <a:cs typeface="Calibri" pitchFamily="34" charset="-120"/>
               </a:rPr>
-              <a:t>Multi-Language</a:t>
-            </a:r>
-            <a:endParaRPr lang="en-US" sz="1300" dirty="0"/>
-          </a:p>
-        </p:txBody>
-      </p:sp>
-      <p:sp>
-        <p:nvSpPr>
-          <p:cNvPr id="30" name="Text 28"/>
-          <p:cNvSpPr/>
-          <p:nvPr/>
-        </p:nvSpPr>
-        <p:spPr>
-          <a:xfrm>
-            <a:off x="548640" y="4297680"/>
-            <a:ext cx="1783080" cy="502920"/>
+              <a:t>Excel Export</a:t>
+            </a:r>
+            <a:endParaRPr lang="en-US" sz="1000" dirty="0"/>
+          </a:p>
+        </p:txBody>
+      </p:sp>
+      <p:sp>
+        <p:nvSpPr>
+          <p:cNvPr id="42" name="Text 40"/>
+          <p:cNvSpPr/>
+          <p:nvPr/>
+        </p:nvSpPr>
+        <p:spPr>
+          <a:xfrm>
+            <a:off x="347472" y="4279392"/>
+            <a:ext cx="1188720" cy="548640"/>
           </a:xfrm>
           <a:prstGeom prst="rect">
             <a:avLst/>
@@ -7381,7 +7897,7 @@
               <a:buNone/>
             </a:pPr>
             <a:r>
-              <a:rPr lang="en-US" sz="1000" dirty="0">
+              <a:rPr lang="en-US" sz="800" dirty="0">
                 <a:solidFill>
                   <a:srgbClr val="5A6B7F"/>
                 </a:solidFill>
@@ -7389,16 +7905,16 @@
                 <a:ea typeface="Calibri" pitchFamily="34" charset="-122"/>
                 <a:cs typeface="Calibri" pitchFamily="34" charset="-120"/>
               </a:rPr>
-              <a:t>EN / DE / FR / IT / ES</a:t>
-            </a:r>
-            <a:endParaRPr lang="en-US" sz="1000" dirty="0"/>
+              <a:t>Multi-sheet reports</a:t>
+            </a:r>
+            <a:endParaRPr lang="en-US" sz="800" dirty="0"/>
           </a:p>
           <a:p>
             <a:pPr indent="0" marL="0">
               <a:buNone/>
             </a:pPr>
             <a:r>
-              <a:rPr lang="en-US" sz="1000" dirty="0">
+              <a:rPr lang="en-US" sz="800" dirty="0">
                 <a:solidFill>
                   <a:srgbClr val="5A6B7F"/>
                 </a:solidFill>
@@ -7406,22 +7922,22 @@
                 <a:ea typeface="Calibri" pitchFamily="34" charset="-122"/>
                 <a:cs typeface="Calibri" pitchFamily="34" charset="-120"/>
               </a:rPr>
-              <a:t>PDF support</a:t>
-            </a:r>
-            <a:endParaRPr lang="en-US" sz="1000" dirty="0"/>
-          </a:p>
-        </p:txBody>
-      </p:sp>
-      <p:sp>
-        <p:nvSpPr>
-          <p:cNvPr id="31" name="Shape 29"/>
-          <p:cNvSpPr/>
-          <p:nvPr/>
-        </p:nvSpPr>
-        <p:spPr>
-          <a:xfrm>
-            <a:off x="2606040" y="3840480"/>
-            <a:ext cx="1965960" cy="1051560"/>
+              <a:t>for offline analysis</a:t>
+            </a:r>
+            <a:endParaRPr lang="en-US" sz="800" dirty="0"/>
+          </a:p>
+        </p:txBody>
+      </p:sp>
+      <p:sp>
+        <p:nvSpPr>
+          <p:cNvPr id="43" name="Shape 41"/>
+          <p:cNvSpPr/>
+          <p:nvPr/>
+        </p:nvSpPr>
+        <p:spPr>
+          <a:xfrm>
+            <a:off x="1737360" y="3840480"/>
+            <a:ext cx="1325880" cy="1051560"/>
           </a:xfrm>
           <a:prstGeom prst="roundRect">
             <a:avLst>
@@ -7448,14 +7964,14 @@
       </p:sp>
       <p:sp>
         <p:nvSpPr>
-          <p:cNvPr id="32" name="Text 30"/>
-          <p:cNvSpPr/>
-          <p:nvPr/>
-        </p:nvSpPr>
-        <p:spPr>
-          <a:xfrm>
-            <a:off x="2697480" y="3931920"/>
-            <a:ext cx="1783080" cy="365760"/>
+          <p:cNvPr id="44" name="Text 42"/>
+          <p:cNvSpPr/>
+          <p:nvPr/>
+        </p:nvSpPr>
+        <p:spPr>
+          <a:xfrm>
+            <a:off x="1810512" y="3913632"/>
+            <a:ext cx="1188720" cy="365760"/>
           </a:xfrm>
           <a:prstGeom prst="rect">
             <a:avLst/>
@@ -7471,7 +7987,7 @@
               <a:buNone/>
             </a:pPr>
             <a:r>
-              <a:rPr lang="en-US" sz="1300" b="1" dirty="0">
+              <a:rPr lang="en-US" sz="1000" b="1" dirty="0">
                 <a:solidFill>
                   <a:srgbClr val="1E3161"/>
                 </a:solidFill>
@@ -7479,22 +7995,22 @@
                 <a:ea typeface="Calibri" pitchFamily="34" charset="-122"/>
                 <a:cs typeface="Calibri" pitchFamily="34" charset="-120"/>
               </a:rPr>
-              <a:t>Due Date Alerts</a:t>
-            </a:r>
-            <a:endParaRPr lang="en-US" sz="1300" dirty="0"/>
-          </a:p>
-        </p:txBody>
-      </p:sp>
-      <p:sp>
-        <p:nvSpPr>
-          <p:cNvPr id="33" name="Text 31"/>
-          <p:cNvSpPr/>
-          <p:nvPr/>
-        </p:nvSpPr>
-        <p:spPr>
-          <a:xfrm>
-            <a:off x="2697480" y="4297680"/>
-            <a:ext cx="1783080" cy="502920"/>
+              <a:t>PDF Preview</a:t>
+            </a:r>
+            <a:endParaRPr lang="en-US" sz="1000" dirty="0"/>
+          </a:p>
+        </p:txBody>
+      </p:sp>
+      <p:sp>
+        <p:nvSpPr>
+          <p:cNvPr id="45" name="Text 43"/>
+          <p:cNvSpPr/>
+          <p:nvPr/>
+        </p:nvSpPr>
+        <p:spPr>
+          <a:xfrm>
+            <a:off x="1810512" y="4279392"/>
+            <a:ext cx="1188720" cy="548640"/>
           </a:xfrm>
           <a:prstGeom prst="rect">
             <a:avLst/>
@@ -7510,7 +8026,7 @@
               <a:buNone/>
             </a:pPr>
             <a:r>
-              <a:rPr lang="en-US" sz="1000" dirty="0">
+              <a:rPr lang="en-US" sz="800" dirty="0">
                 <a:solidFill>
                   <a:srgbClr val="5A6B7F"/>
                 </a:solidFill>
@@ -7518,16 +8034,16 @@
                 <a:ea typeface="Calibri" pitchFamily="34" charset="-122"/>
                 <a:cs typeface="Calibri" pitchFamily="34" charset="-120"/>
               </a:rPr>
-              <a:t>Color-coded urgency</a:t>
-            </a:r>
-            <a:endParaRPr lang="en-US" sz="1000" dirty="0"/>
+              <a:t>Side-by-side original</a:t>
+            </a:r>
+            <a:endParaRPr lang="en-US" sz="800" dirty="0"/>
           </a:p>
           <a:p>
             <a:pPr indent="0" marL="0">
               <a:buNone/>
             </a:pPr>
             <a:r>
-              <a:rPr lang="en-US" sz="1000" dirty="0">
+              <a:rPr lang="en-US" sz="800" dirty="0">
                 <a:solidFill>
                   <a:srgbClr val="5A6B7F"/>
                 </a:solidFill>
@@ -7535,22 +8051,22 @@
                 <a:ea typeface="Calibri" pitchFamily="34" charset="-122"/>
                 <a:cs typeface="Calibri" pitchFamily="34" charset="-120"/>
               </a:rPr>
-              <a:t>with countdowns</a:t>
-            </a:r>
-            <a:endParaRPr lang="en-US" sz="1000" dirty="0"/>
-          </a:p>
-        </p:txBody>
-      </p:sp>
-      <p:sp>
-        <p:nvSpPr>
-          <p:cNvPr id="34" name="Shape 32"/>
-          <p:cNvSpPr/>
-          <p:nvPr/>
-        </p:nvSpPr>
-        <p:spPr>
-          <a:xfrm>
-            <a:off x="4754880" y="3840480"/>
-            <a:ext cx="1965960" cy="1051560"/>
+              <a:t>and extracted data</a:t>
+            </a:r>
+            <a:endParaRPr lang="en-US" sz="800" dirty="0"/>
+          </a:p>
+        </p:txBody>
+      </p:sp>
+      <p:sp>
+        <p:nvSpPr>
+          <p:cNvPr id="46" name="Shape 44"/>
+          <p:cNvSpPr/>
+          <p:nvPr/>
+        </p:nvSpPr>
+        <p:spPr>
+          <a:xfrm>
+            <a:off x="3200400" y="3840480"/>
+            <a:ext cx="1325880" cy="1051560"/>
           </a:xfrm>
           <a:prstGeom prst="roundRect">
             <a:avLst>
@@ -7577,14 +8093,14 @@
       </p:sp>
       <p:sp>
         <p:nvSpPr>
-          <p:cNvPr id="35" name="Text 33"/>
-          <p:cNvSpPr/>
-          <p:nvPr/>
-        </p:nvSpPr>
-        <p:spPr>
-          <a:xfrm>
-            <a:off x="4846320" y="3931920"/>
-            <a:ext cx="1783080" cy="365760"/>
+          <p:cNvPr id="47" name="Text 45"/>
+          <p:cNvSpPr/>
+          <p:nvPr/>
+        </p:nvSpPr>
+        <p:spPr>
+          <a:xfrm>
+            <a:off x="3273552" y="3913632"/>
+            <a:ext cx="1188720" cy="365760"/>
           </a:xfrm>
           <a:prstGeom prst="rect">
             <a:avLst/>
@@ -7600,7 +8116,7 @@
               <a:buNone/>
             </a:pPr>
             <a:r>
-              <a:rPr lang="en-US" sz="1300" b="1" dirty="0">
+              <a:rPr lang="en-US" sz="1000" b="1" dirty="0">
                 <a:solidFill>
                   <a:srgbClr val="1E3161"/>
                 </a:solidFill>
@@ -7608,22 +8124,22 @@
                 <a:ea typeface="Calibri" pitchFamily="34" charset="-122"/>
                 <a:cs typeface="Calibri" pitchFamily="34" charset="-120"/>
               </a:rPr>
-              <a:t>Excel Export</a:t>
-            </a:r>
-            <a:endParaRPr lang="en-US" sz="1300" dirty="0"/>
-          </a:p>
-        </p:txBody>
-      </p:sp>
-      <p:sp>
-        <p:nvSpPr>
-          <p:cNvPr id="36" name="Text 34"/>
-          <p:cNvSpPr/>
-          <p:nvPr/>
-        </p:nvSpPr>
-        <p:spPr>
-          <a:xfrm>
-            <a:off x="4846320" y="4297680"/>
-            <a:ext cx="1783080" cy="502920"/>
+              <a:t>GP Contacts</a:t>
+            </a:r>
+            <a:endParaRPr lang="en-US" sz="1000" dirty="0"/>
+          </a:p>
+        </p:txBody>
+      </p:sp>
+      <p:sp>
+        <p:nvSpPr>
+          <p:cNvPr id="48" name="Text 46"/>
+          <p:cNvSpPr/>
+          <p:nvPr/>
+        </p:nvSpPr>
+        <p:spPr>
+          <a:xfrm>
+            <a:off x="3273552" y="4279392"/>
+            <a:ext cx="1188720" cy="548640"/>
           </a:xfrm>
           <a:prstGeom prst="rect">
             <a:avLst/>
@@ -7639,7 +8155,7 @@
               <a:buNone/>
             </a:pPr>
             <a:r>
-              <a:rPr lang="en-US" sz="1000" dirty="0">
+              <a:rPr lang="en-US" sz="800" dirty="0">
                 <a:solidFill>
                   <a:srgbClr val="5A6B7F"/>
                 </a:solidFill>
@@ -7647,16 +8163,16 @@
                 <a:ea typeface="Calibri" pitchFamily="34" charset="-122"/>
                 <a:cs typeface="Calibri" pitchFamily="34" charset="-120"/>
               </a:rPr>
-              <a:t>Multi-sheet reports</a:t>
-            </a:r>
-            <a:endParaRPr lang="en-US" sz="1000" dirty="0"/>
+              <a:t>Quick-access directory</a:t>
+            </a:r>
+            <a:endParaRPr lang="en-US" sz="800" dirty="0"/>
           </a:p>
           <a:p>
             <a:pPr indent="0" marL="0">
               <a:buNone/>
             </a:pPr>
             <a:r>
-              <a:rPr lang="en-US" sz="1000" dirty="0">
+              <a:rPr lang="en-US" sz="800" dirty="0">
                 <a:solidFill>
                   <a:srgbClr val="5A6B7F"/>
                 </a:solidFill>
@@ -7664,22 +8180,22 @@
                 <a:ea typeface="Calibri" pitchFamily="34" charset="-122"/>
                 <a:cs typeface="Calibri" pitchFamily="34" charset="-120"/>
               </a:rPr>
-              <a:t>for offline analysis</a:t>
-            </a:r>
-            <a:endParaRPr lang="en-US" sz="1000" dirty="0"/>
-          </a:p>
-        </p:txBody>
-      </p:sp>
-      <p:sp>
-        <p:nvSpPr>
-          <p:cNvPr id="37" name="Shape 35"/>
-          <p:cNvSpPr/>
-          <p:nvPr/>
-        </p:nvSpPr>
-        <p:spPr>
-          <a:xfrm>
-            <a:off x="6903720" y="3840480"/>
-            <a:ext cx="1965960" cy="1051560"/>
+              <a:t>for escalation</a:t>
+            </a:r>
+            <a:endParaRPr lang="en-US" sz="800" dirty="0"/>
+          </a:p>
+        </p:txBody>
+      </p:sp>
+      <p:sp>
+        <p:nvSpPr>
+          <p:cNvPr id="49" name="Shape 47"/>
+          <p:cNvSpPr/>
+          <p:nvPr/>
+        </p:nvSpPr>
+        <p:spPr>
+          <a:xfrm>
+            <a:off x="4663440" y="3840480"/>
+            <a:ext cx="1325880" cy="1051560"/>
           </a:xfrm>
           <a:prstGeom prst="roundRect">
             <a:avLst>
@@ -7706,14 +8222,14 @@
       </p:sp>
       <p:sp>
         <p:nvSpPr>
-          <p:cNvPr id="38" name="Text 36"/>
-          <p:cNvSpPr/>
-          <p:nvPr/>
-        </p:nvSpPr>
-        <p:spPr>
-          <a:xfrm>
-            <a:off x="6995160" y="3931920"/>
-            <a:ext cx="1783080" cy="365760"/>
+          <p:cNvPr id="50" name="Text 48"/>
+          <p:cNvSpPr/>
+          <p:nvPr/>
+        </p:nvSpPr>
+        <p:spPr>
+          <a:xfrm>
+            <a:off x="4736592" y="3913632"/>
+            <a:ext cx="1188720" cy="365760"/>
           </a:xfrm>
           <a:prstGeom prst="rect">
             <a:avLst/>
@@ -7729,7 +8245,7 @@
               <a:buNone/>
             </a:pPr>
             <a:r>
-              <a:rPr lang="en-US" sz="1300" b="1" dirty="0">
+              <a:rPr lang="en-US" sz="1000" b="1" dirty="0">
                 <a:solidFill>
                   <a:srgbClr val="1E3161"/>
                 </a:solidFill>
@@ -7737,22 +8253,22 @@
                 <a:ea typeface="Calibri" pitchFamily="34" charset="-122"/>
                 <a:cs typeface="Calibri" pitchFamily="34" charset="-120"/>
               </a:rPr>
-              <a:t>Duplicate Detection</a:t>
-            </a:r>
-            <a:endParaRPr lang="en-US" sz="1300" dirty="0"/>
-          </a:p>
-        </p:txBody>
-      </p:sp>
-      <p:sp>
-        <p:nvSpPr>
-          <p:cNvPr id="39" name="Text 37"/>
-          <p:cNvSpPr/>
-          <p:nvPr/>
-        </p:nvSpPr>
-        <p:spPr>
-          <a:xfrm>
-            <a:off x="6995160" y="4297680"/>
-            <a:ext cx="1783080" cy="502920"/>
+              <a:t>Dark / Light Mode</a:t>
+            </a:r>
+            <a:endParaRPr lang="en-US" sz="1000" dirty="0"/>
+          </a:p>
+        </p:txBody>
+      </p:sp>
+      <p:sp>
+        <p:nvSpPr>
+          <p:cNvPr id="51" name="Text 49"/>
+          <p:cNvSpPr/>
+          <p:nvPr/>
+        </p:nvSpPr>
+        <p:spPr>
+          <a:xfrm>
+            <a:off x="4736592" y="4279392"/>
+            <a:ext cx="1188720" cy="548640"/>
           </a:xfrm>
           <a:prstGeom prst="rect">
             <a:avLst/>
@@ -7768,7 +8284,7 @@
               <a:buNone/>
             </a:pPr>
             <a:r>
-              <a:rPr lang="en-US" sz="1000" dirty="0">
+              <a:rPr lang="en-US" sz="800" dirty="0">
                 <a:solidFill>
                   <a:srgbClr val="5A6B7F"/>
                 </a:solidFill>
@@ -7776,16 +8292,128 @@
                 <a:ea typeface="Calibri" pitchFamily="34" charset="-122"/>
                 <a:cs typeface="Calibri" pitchFamily="34" charset="-120"/>
               </a:rPr>
-              <a:t>Exact + fuzzy match</a:t>
+              <a:t>Full theme support</a:t>
+            </a:r>
+            <a:endParaRPr lang="en-US" sz="800" dirty="0"/>
+          </a:p>
+          <a:p>
+            <a:pPr indent="0" marL="0">
+              <a:buNone/>
+            </a:pPr>
+            <a:r>
+              <a:rPr lang="en-US" sz="800" dirty="0">
+                <a:solidFill>
+                  <a:srgbClr val="5A6B7F"/>
+                </a:solidFill>
+                <a:latin typeface="Calibri" pitchFamily="34" charset="0"/>
+                <a:ea typeface="Calibri" pitchFamily="34" charset="-122"/>
+                <a:cs typeface="Calibri" pitchFamily="34" charset="-120"/>
+              </a:rPr>
+              <a:t>across all pages</a:t>
+            </a:r>
+            <a:endParaRPr lang="en-US" sz="800" dirty="0"/>
+          </a:p>
+        </p:txBody>
+      </p:sp>
+      <p:sp>
+        <p:nvSpPr>
+          <p:cNvPr id="52" name="Shape 50"/>
+          <p:cNvSpPr/>
+          <p:nvPr/>
+        </p:nvSpPr>
+        <p:spPr>
+          <a:xfrm>
+            <a:off x="6126480" y="3840480"/>
+            <a:ext cx="1325880" cy="1051560"/>
+          </a:xfrm>
+          <a:prstGeom prst="roundRect">
+            <a:avLst>
+              <a:gd name="adj" fmla="val 6957"/>
+            </a:avLst>
+          </a:prstGeom>
+          <a:solidFill>
+            <a:srgbClr val="FFFFFF"/>
+          </a:solidFill>
+          <a:ln w="6350">
+            <a:solidFill>
+              <a:srgbClr val="E0E0E0"/>
+            </a:solidFill>
+            <a:prstDash val="solid"/>
+          </a:ln>
+          <a:effectLst>
+            <a:outerShdw sx="100000" sy="100000" kx="0" ky="0" algn="bl" rotWithShape="0" blurRad="50800" dist="12700" dir="8100000">
+              <a:srgbClr val="000000">
+                <a:alpha val="8000"/>
+              </a:srgbClr>
+            </a:outerShdw>
+          </a:effectLst>
+        </p:spPr>
+      </p:sp>
+      <p:sp>
+        <p:nvSpPr>
+          <p:cNvPr id="53" name="Text 51"/>
+          <p:cNvSpPr/>
+          <p:nvPr/>
+        </p:nvSpPr>
+        <p:spPr>
+          <a:xfrm>
+            <a:off x="6199632" y="3913632"/>
+            <a:ext cx="1188720" cy="365760"/>
+          </a:xfrm>
+          <a:prstGeom prst="rect">
+            <a:avLst/>
+          </a:prstGeom>
+          <a:noFill/>
+          <a:ln/>
+        </p:spPr>
+        <p:txBody>
+          <a:bodyPr wrap="square" lIns="0" tIns="0" rIns="0" bIns="0" rtlCol="0" anchor="ctr"/>
+          <a:lstStyle/>
+          <a:p>
+            <a:pPr indent="0" marL="0">
+              <a:buNone/>
+            </a:pPr>
+            <a:r>
+              <a:rPr lang="en-US" sz="1000" b="1" dirty="0">
+                <a:solidFill>
+                  <a:srgbClr val="1E3161"/>
+                </a:solidFill>
+                <a:latin typeface="Calibri" pitchFamily="34" charset="0"/>
+                <a:ea typeface="Calibri" pitchFamily="34" charset="-122"/>
+                <a:cs typeface="Calibri" pitchFamily="34" charset="-120"/>
+              </a:rPr>
+              <a:t>PDF Archive</a:t>
             </a:r>
             <a:endParaRPr lang="en-US" sz="1000" dirty="0"/>
           </a:p>
+        </p:txBody>
+      </p:sp>
+      <p:sp>
+        <p:nvSpPr>
+          <p:cNvPr id="54" name="Text 52"/>
+          <p:cNvSpPr/>
+          <p:nvPr/>
+        </p:nvSpPr>
+        <p:spPr>
+          <a:xfrm>
+            <a:off x="6199632" y="4279392"/>
+            <a:ext cx="1188720" cy="548640"/>
+          </a:xfrm>
+          <a:prstGeom prst="rect">
+            <a:avLst/>
+          </a:prstGeom>
+          <a:noFill/>
+          <a:ln/>
+        </p:spPr>
+        <p:txBody>
+          <a:bodyPr wrap="square" lIns="0" tIns="0" rIns="0" bIns="0" rtlCol="0" anchor="ctr"/>
+          <a:lstStyle/>
           <a:p>
             <a:pPr indent="0" marL="0">
               <a:buNone/>
             </a:pPr>
             <a:r>
-              <a:rPr lang="en-US" sz="1000" dirty="0">
+              <a:rPr lang="en-US" sz="800" dirty="0">
                 <a:solidFill>
                   <a:srgbClr val="5A6B7F"/>
                 </a:solidFill>
@@ -7793,9 +8421,155 @@
                 <a:ea typeface="Calibri" pitchFamily="34" charset="-122"/>
                 <a:cs typeface="Calibri" pitchFamily="34" charset="-120"/>
               </a:rPr>
-              <a:t>with override</a:t>
+              <a:t>Persistent storage</a:t>
+            </a:r>
+            <a:endParaRPr lang="en-US" sz="800" dirty="0"/>
+          </a:p>
+          <a:p>
+            <a:pPr indent="0" marL="0">
+              <a:buNone/>
+            </a:pPr>
+            <a:r>
+              <a:rPr lang="en-US" sz="800" dirty="0">
+                <a:solidFill>
+                  <a:srgbClr val="5A6B7F"/>
+                </a:solidFill>
+                <a:latin typeface="Calibri" pitchFamily="34" charset="0"/>
+                <a:ea typeface="Calibri" pitchFamily="34" charset="-122"/>
+                <a:cs typeface="Calibri" pitchFamily="34" charset="-120"/>
+              </a:rPr>
+              <a:t>with audit download</a:t>
+            </a:r>
+            <a:endParaRPr lang="en-US" sz="800" dirty="0"/>
+          </a:p>
+        </p:txBody>
+      </p:sp>
+      <p:sp>
+        <p:nvSpPr>
+          <p:cNvPr id="55" name="Shape 53"/>
+          <p:cNvSpPr/>
+          <p:nvPr/>
+        </p:nvSpPr>
+        <p:spPr>
+          <a:xfrm>
+            <a:off x="7589520" y="3840480"/>
+            <a:ext cx="1325880" cy="1051560"/>
+          </a:xfrm>
+          <a:prstGeom prst="roundRect">
+            <a:avLst>
+              <a:gd name="adj" fmla="val 6957"/>
+            </a:avLst>
+          </a:prstGeom>
+          <a:solidFill>
+            <a:srgbClr val="FFFFFF"/>
+          </a:solidFill>
+          <a:ln w="6350">
+            <a:solidFill>
+              <a:srgbClr val="E0E0E0"/>
+            </a:solidFill>
+            <a:prstDash val="solid"/>
+          </a:ln>
+          <a:effectLst>
+            <a:outerShdw sx="100000" sy="100000" kx="0" ky="0" algn="bl" rotWithShape="0" blurRad="50800" dist="12700" dir="8100000">
+              <a:srgbClr val="000000">
+                <a:alpha val="8000"/>
+              </a:srgbClr>
+            </a:outerShdw>
+          </a:effectLst>
+        </p:spPr>
+      </p:sp>
+      <p:sp>
+        <p:nvSpPr>
+          <p:cNvPr id="56" name="Text 54"/>
+          <p:cNvSpPr/>
+          <p:nvPr/>
+        </p:nvSpPr>
+        <p:spPr>
+          <a:xfrm>
+            <a:off x="7662672" y="3913632"/>
+            <a:ext cx="1188720" cy="365760"/>
+          </a:xfrm>
+          <a:prstGeom prst="rect">
+            <a:avLst/>
+          </a:prstGeom>
+          <a:noFill/>
+          <a:ln/>
+        </p:spPr>
+        <p:txBody>
+          <a:bodyPr wrap="square" lIns="0" tIns="0" rIns="0" bIns="0" rtlCol="0" anchor="ctr"/>
+          <a:lstStyle/>
+          <a:p>
+            <a:pPr indent="0" marL="0">
+              <a:buNone/>
+            </a:pPr>
+            <a:r>
+              <a:rPr lang="en-US" sz="1000" b="1" dirty="0">
+                <a:solidFill>
+                  <a:srgbClr val="1E3161"/>
+                </a:solidFill>
+                <a:latin typeface="Calibri" pitchFamily="34" charset="0"/>
+                <a:ea typeface="Calibri" pitchFamily="34" charset="-122"/>
+                <a:cs typeface="Calibri" pitchFamily="34" charset="-120"/>
+              </a:rPr>
+              <a:t>Email Integration</a:t>
             </a:r>
             <a:endParaRPr lang="en-US" sz="1000" dirty="0"/>
+          </a:p>
+        </p:txBody>
+      </p:sp>
+      <p:sp>
+        <p:nvSpPr>
+          <p:cNvPr id="57" name="Text 55"/>
+          <p:cNvSpPr/>
+          <p:nvPr/>
+        </p:nvSpPr>
+        <p:spPr>
+          <a:xfrm>
+            <a:off x="7662672" y="4279392"/>
+            <a:ext cx="1188720" cy="548640"/>
+          </a:xfrm>
+          <a:prstGeom prst="rect">
+            <a:avLst/>
+          </a:prstGeom>
+          <a:noFill/>
+          <a:ln/>
+        </p:spPr>
+        <p:txBody>
+          <a:bodyPr wrap="square" lIns="0" tIns="0" rIns="0" bIns="0" rtlCol="0" anchor="ctr"/>
+          <a:lstStyle/>
+          <a:p>
+            <a:pPr indent="0" marL="0">
+              <a:buNone/>
+            </a:pPr>
+            <a:r>
+              <a:rPr lang="en-US" sz="800" dirty="0">
+                <a:solidFill>
+                  <a:srgbClr val="5A6B7F"/>
+                </a:solidFill>
+                <a:latin typeface="Calibri" pitchFamily="34" charset="0"/>
+                <a:ea typeface="Calibri" pitchFamily="34" charset="-122"/>
+                <a:cs typeface="Calibri" pitchFamily="34" charset="-120"/>
+              </a:rPr>
+              <a:t>SMTP sending with</a:t>
+            </a:r>
+            <a:endParaRPr lang="en-US" sz="800" dirty="0"/>
+          </a:p>
+          <a:p>
+            <a:pPr indent="0" marL="0">
+              <a:buNone/>
+            </a:pPr>
+            <a:r>
+              <a:rPr lang="en-US" sz="800" dirty="0">
+                <a:solidFill>
+                  <a:srgbClr val="5A6B7F"/>
+                </a:solidFill>
+                <a:latin typeface="Calibri" pitchFamily="34" charset="0"/>
+                <a:ea typeface="Calibri" pitchFamily="34" charset="-122"/>
+                <a:cs typeface="Calibri" pitchFamily="34" charset="-120"/>
+              </a:rPr>
+              <a:t>HTML templates</a:t>
+            </a:r>
+            <a:endParaRPr lang="en-US" sz="800" dirty="0"/>
           </a:p>
         </p:txBody>
       </p:sp>
@@ -7903,11 +8677,11 @@
         <p:spPr>
           <a:xfrm>
             <a:off x="457200" y="1280160"/>
-            <a:ext cx="4114800" cy="777240"/>
+            <a:ext cx="4114800" cy="658368"/>
           </a:xfrm>
           <a:prstGeom prst="roundRect">
             <a:avLst>
-              <a:gd name="adj" fmla="val 9412"/>
+              <a:gd name="adj" fmla="val 11111"/>
             </a:avLst>
           </a:prstGeom>
           <a:solidFill>
@@ -7924,8 +8698,8 @@
         </p:nvSpPr>
         <p:spPr>
           <a:xfrm>
-            <a:off x="594360" y="1463040"/>
-            <a:ext cx="411480" cy="411480"/>
+            <a:off x="566928" y="1417320"/>
+            <a:ext cx="365760" cy="365760"/>
           </a:xfrm>
           <a:prstGeom prst="ellipse">
             <a:avLst/>
@@ -7944,8 +8718,8 @@
         </p:nvSpPr>
         <p:spPr>
           <a:xfrm>
-            <a:off x="594360" y="1463040"/>
-            <a:ext cx="411480" cy="411480"/>
+            <a:off x="566928" y="1417320"/>
+            <a:ext cx="365760" cy="365760"/>
           </a:xfrm>
           <a:prstGeom prst="rect">
             <a:avLst/>
@@ -7961,7 +8735,7 @@
               <a:buNone/>
             </a:pPr>
             <a:r>
-              <a:rPr lang="en-US" sz="1600" b="1" dirty="0">
+              <a:rPr lang="en-US" sz="1400" b="1" dirty="0">
                 <a:solidFill>
                   <a:srgbClr val="FFFFFF"/>
                 </a:solidFill>
@@ -7971,7 +8745,7 @@
               </a:rPr>
               <a:t>S</a:t>
             </a:r>
-            <a:endParaRPr lang="en-US" sz="1600" dirty="0"/>
+            <a:endParaRPr lang="en-US" sz="1400" dirty="0"/>
           </a:p>
         </p:txBody>
       </p:sp>
@@ -7983,8 +8757,8 @@
         </p:nvSpPr>
         <p:spPr>
           <a:xfrm>
-            <a:off x="1143000" y="1353312"/>
-            <a:ext cx="3200400" cy="320040"/>
+            <a:off x="1051560" y="1335024"/>
+            <a:ext cx="3291840" cy="274320"/>
           </a:xfrm>
           <a:prstGeom prst="rect">
             <a:avLst/>
@@ -8000,7 +8774,7 @@
               <a:buNone/>
             </a:pPr>
             <a:r>
-              <a:rPr lang="en-US" sz="1300" b="1" dirty="0">
+              <a:rPr lang="en-US" sz="1200" b="1" dirty="0">
                 <a:solidFill>
                   <a:srgbClr val="FFFFFF"/>
                 </a:solidFill>
@@ -8010,7 +8784,7 @@
               </a:rPr>
               <a:t>Commitment Check</a:t>
             </a:r>
-            <a:endParaRPr lang="en-US" sz="1300" dirty="0"/>
+            <a:endParaRPr lang="en-US" sz="1200" dirty="0"/>
           </a:p>
         </p:txBody>
       </p:sp>
@@ -8022,8 +8796,8 @@
         </p:nvSpPr>
         <p:spPr>
           <a:xfrm>
-            <a:off x="1143000" y="1664208"/>
-            <a:ext cx="3200400" cy="320040"/>
+            <a:off x="1051560" y="1609344"/>
+            <a:ext cx="3291840" cy="274320"/>
           </a:xfrm>
           <a:prstGeom prst="rect">
             <a:avLst/>
@@ -8039,7 +8813,7 @@
               <a:buNone/>
             </a:pPr>
             <a:r>
-              <a:rPr lang="en-US" sz="1000" dirty="0">
+              <a:rPr lang="en-US" sz="900" dirty="0">
                 <a:solidFill>
                   <a:srgbClr val="E8EDF2"/>
                 </a:solidFill>
@@ -8049,7 +8823,7 @@
               </a:rPr>
               <a:t>Validates amount against remaining open commitment before approval</a:t>
             </a:r>
-            <a:endParaRPr lang="en-US" sz="1000" dirty="0"/>
+            <a:endParaRPr lang="en-US" sz="900" dirty="0"/>
           </a:p>
         </p:txBody>
       </p:sp>
@@ -8062,11 +8836,11 @@
         <p:spPr>
           <a:xfrm>
             <a:off x="4754880" y="1280160"/>
-            <a:ext cx="4114800" cy="777240"/>
+            <a:ext cx="4114800" cy="658368"/>
           </a:xfrm>
           <a:prstGeom prst="roundRect">
             <a:avLst>
-              <a:gd name="adj" fmla="val 9412"/>
+              <a:gd name="adj" fmla="val 11111"/>
             </a:avLst>
           </a:prstGeom>
           <a:solidFill>
@@ -8083,8 +8857,8 @@
         </p:nvSpPr>
         <p:spPr>
           <a:xfrm>
-            <a:off x="4892040" y="1463040"/>
-            <a:ext cx="411480" cy="411480"/>
+            <a:off x="4864608" y="1417320"/>
+            <a:ext cx="365760" cy="365760"/>
           </a:xfrm>
           <a:prstGeom prst="ellipse">
             <a:avLst/>
@@ -8103,8 +8877,8 @@
         </p:nvSpPr>
         <p:spPr>
           <a:xfrm>
-            <a:off x="4892040" y="1463040"/>
-            <a:ext cx="411480" cy="411480"/>
+            <a:off x="4864608" y="1417320"/>
+            <a:ext cx="365760" cy="365760"/>
           </a:xfrm>
           <a:prstGeom prst="rect">
             <a:avLst/>
@@ -8120,7 +8894,7 @@
               <a:buNone/>
             </a:pPr>
             <a:r>
-              <a:rPr lang="en-US" sz="1600" b="1" dirty="0">
+              <a:rPr lang="en-US" sz="1400" b="1" dirty="0">
                 <a:solidFill>
                   <a:srgbClr val="FFFFFF"/>
                 </a:solidFill>
@@ -8130,7 +8904,7 @@
               </a:rPr>
               <a:t>S</a:t>
             </a:r>
-            <a:endParaRPr lang="en-US" sz="1600" dirty="0"/>
+            <a:endParaRPr lang="en-US" sz="1400" dirty="0"/>
           </a:p>
         </p:txBody>
       </p:sp>
@@ -8142,8 +8916,8 @@
         </p:nvSpPr>
         <p:spPr>
           <a:xfrm>
-            <a:off x="5440680" y="1353312"/>
-            <a:ext cx="3200400" cy="320040"/>
+            <a:off x="5349240" y="1335024"/>
+            <a:ext cx="3291840" cy="274320"/>
           </a:xfrm>
           <a:prstGeom prst="rect">
             <a:avLst/>
@@ -8159,7 +8933,7 @@
               <a:buNone/>
             </a:pPr>
             <a:r>
-              <a:rPr lang="en-US" sz="1300" b="1" dirty="0">
+              <a:rPr lang="en-US" sz="1200" b="1" dirty="0">
                 <a:solidFill>
                   <a:srgbClr val="FFFFFF"/>
                 </a:solidFill>
@@ -8169,7 +8943,7 @@
               </a:rPr>
               <a:t>Wire Verification</a:t>
             </a:r>
-            <a:endParaRPr lang="en-US" sz="1300" dirty="0"/>
+            <a:endParaRPr lang="en-US" sz="1200" dirty="0"/>
           </a:p>
         </p:txBody>
       </p:sp>
@@ -8181,8 +8955,8 @@
         </p:nvSpPr>
         <p:spPr>
           <a:xfrm>
-            <a:off x="5440680" y="1664208"/>
-            <a:ext cx="3200400" cy="320040"/>
+            <a:off x="5349240" y="1609344"/>
+            <a:ext cx="3291840" cy="274320"/>
           </a:xfrm>
           <a:prstGeom prst="rect">
             <a:avLst/>
@@ -8198,7 +8972,7 @@
               <a:buNone/>
             </a:pPr>
             <a:r>
-              <a:rPr lang="en-US" sz="1000" dirty="0">
+              <a:rPr lang="en-US" sz="900" dirty="0">
                 <a:solidFill>
                   <a:srgbClr val="E8EDF2"/>
                 </a:solidFill>
@@ -8208,7 +8982,7 @@
               </a:rPr>
               <a:t>IBAN normalized and compared against approved wire instructions database</a:t>
             </a:r>
-            <a:endParaRPr lang="en-US" sz="1000" dirty="0"/>
+            <a:endParaRPr lang="en-US" sz="900" dirty="0"/>
           </a:p>
         </p:txBody>
       </p:sp>
@@ -8220,12 +8994,12 @@
         </p:nvSpPr>
         <p:spPr>
           <a:xfrm>
-            <a:off x="457200" y="2194560"/>
-            <a:ext cx="4114800" cy="777240"/>
+            <a:off x="457200" y="2057400"/>
+            <a:ext cx="4114800" cy="658368"/>
           </a:xfrm>
           <a:prstGeom prst="roundRect">
             <a:avLst>
-              <a:gd name="adj" fmla="val 9412"/>
+              <a:gd name="adj" fmla="val 11111"/>
             </a:avLst>
           </a:prstGeom>
           <a:solidFill>
@@ -8242,8 +9016,8 @@
         </p:nvSpPr>
         <p:spPr>
           <a:xfrm>
-            <a:off x="594360" y="2377440"/>
-            <a:ext cx="411480" cy="411480"/>
+            <a:off x="566928" y="2194560"/>
+            <a:ext cx="365760" cy="365760"/>
           </a:xfrm>
           <a:prstGeom prst="ellipse">
             <a:avLst/>
@@ -8262,8 +9036,8 @@
         </p:nvSpPr>
         <p:spPr>
           <a:xfrm>
-            <a:off x="594360" y="2377440"/>
-            <a:ext cx="411480" cy="411480"/>
+            <a:off x="566928" y="2194560"/>
+            <a:ext cx="365760" cy="365760"/>
           </a:xfrm>
           <a:prstGeom prst="rect">
             <a:avLst/>
@@ -8279,7 +9053,7 @@
               <a:buNone/>
             </a:pPr>
             <a:r>
-              <a:rPr lang="en-US" sz="1600" b="1" dirty="0">
+              <a:rPr lang="en-US" sz="1400" b="1" dirty="0">
                 <a:solidFill>
                   <a:srgbClr val="FFFFFF"/>
                 </a:solidFill>
@@ -8289,7 +9063,7 @@
               </a:rPr>
               <a:t>S</a:t>
             </a:r>
-            <a:endParaRPr lang="en-US" sz="1600" dirty="0"/>
+            <a:endParaRPr lang="en-US" sz="1400" dirty="0"/>
           </a:p>
         </p:txBody>
       </p:sp>
@@ -8301,8 +9075,8 @@
         </p:nvSpPr>
         <p:spPr>
           <a:xfrm>
-            <a:off x="1143000" y="2267712"/>
-            <a:ext cx="3200400" cy="320040"/>
+            <a:off x="1051560" y="2112264"/>
+            <a:ext cx="3291840" cy="274320"/>
           </a:xfrm>
           <a:prstGeom prst="rect">
             <a:avLst/>
@@ -8318,7 +9092,7 @@
               <a:buNone/>
             </a:pPr>
             <a:r>
-              <a:rPr lang="en-US" sz="1300" b="1" dirty="0">
+              <a:rPr lang="en-US" sz="1200" b="1" dirty="0">
                 <a:solidFill>
                   <a:srgbClr val="FFFFFF"/>
                 </a:solidFill>
@@ -8328,7 +9102,7 @@
               </a:rPr>
               <a:t>Duplicate Detection</a:t>
             </a:r>
-            <a:endParaRPr lang="en-US" sz="1300" dirty="0"/>
+            <a:endParaRPr lang="en-US" sz="1200" dirty="0"/>
           </a:p>
         </p:txBody>
       </p:sp>
@@ -8340,8 +9114,8 @@
         </p:nvSpPr>
         <p:spPr>
           <a:xfrm>
-            <a:off x="1143000" y="2578608"/>
-            <a:ext cx="3200400" cy="320040"/>
+            <a:off x="1051560" y="2386584"/>
+            <a:ext cx="3291840" cy="274320"/>
           </a:xfrm>
           <a:prstGeom prst="rect">
             <a:avLst/>
@@ -8357,7 +9131,7 @@
               <a:buNone/>
             </a:pPr>
             <a:r>
-              <a:rPr lang="en-US" sz="1000" dirty="0">
+              <a:rPr lang="en-US" sz="900" dirty="0">
                 <a:solidFill>
                   <a:srgbClr val="E8EDF2"/>
                 </a:solidFill>
@@ -8367,7 +9141,7 @@
               </a:rPr>
               <a:t>Exact + fuzzy matching prevents re-processing of same capital call</a:t>
             </a:r>
-            <a:endParaRPr lang="en-US" sz="1000" dirty="0"/>
+            <a:endParaRPr lang="en-US" sz="900" dirty="0"/>
           </a:p>
         </p:txBody>
       </p:sp>
@@ -8379,12 +9153,12 @@
         </p:nvSpPr>
         <p:spPr>
           <a:xfrm>
-            <a:off x="4754880" y="2194560"/>
-            <a:ext cx="4114800" cy="777240"/>
+            <a:off x="4754880" y="2057400"/>
+            <a:ext cx="4114800" cy="658368"/>
           </a:xfrm>
           <a:prstGeom prst="roundRect">
             <a:avLst>
-              <a:gd name="adj" fmla="val 9412"/>
+              <a:gd name="adj" fmla="val 11111"/>
             </a:avLst>
           </a:prstGeom>
           <a:solidFill>
@@ -8401,8 +9175,8 @@
         </p:nvSpPr>
         <p:spPr>
           <a:xfrm>
-            <a:off x="4892040" y="2377440"/>
-            <a:ext cx="411480" cy="411480"/>
+            <a:off x="4864608" y="2194560"/>
+            <a:ext cx="365760" cy="365760"/>
           </a:xfrm>
           <a:prstGeom prst="ellipse">
             <a:avLst/>
@@ -8421,8 +9195,8 @@
         </p:nvSpPr>
         <p:spPr>
           <a:xfrm>
-            <a:off x="4892040" y="2377440"/>
-            <a:ext cx="411480" cy="411480"/>
+            <a:off x="4864608" y="2194560"/>
+            <a:ext cx="365760" cy="365760"/>
           </a:xfrm>
           <a:prstGeom prst="rect">
             <a:avLst/>
@@ -8438,7 +9212,7 @@
               <a:buNone/>
             </a:pPr>
             <a:r>
-              <a:rPr lang="en-US" sz="1600" b="1" dirty="0">
+              <a:rPr lang="en-US" sz="1400" b="1" dirty="0">
                 <a:solidFill>
                   <a:srgbClr val="FFFFFF"/>
                 </a:solidFill>
@@ -8448,7 +9222,7 @@
               </a:rPr>
               <a:t>S</a:t>
             </a:r>
-            <a:endParaRPr lang="en-US" sz="1600" dirty="0"/>
+            <a:endParaRPr lang="en-US" sz="1400" dirty="0"/>
           </a:p>
         </p:txBody>
       </p:sp>
@@ -8460,8 +9234,8 @@
         </p:nvSpPr>
         <p:spPr>
           <a:xfrm>
-            <a:off x="5440680" y="2267712"/>
-            <a:ext cx="3200400" cy="320040"/>
+            <a:off x="5349240" y="2112264"/>
+            <a:ext cx="3291840" cy="274320"/>
           </a:xfrm>
           <a:prstGeom prst="rect">
             <a:avLst/>
@@ -8477,7 +9251,7 @@
               <a:buNone/>
             </a:pPr>
             <a:r>
-              <a:rPr lang="en-US" sz="1300" b="1" dirty="0">
+              <a:rPr lang="en-US" sz="1200" b="1" dirty="0">
                 <a:solidFill>
                   <a:srgbClr val="FFFFFF"/>
                 </a:solidFill>
@@ -8487,7 +9261,7 @@
               </a:rPr>
               <a:t>4-Eye Principle</a:t>
             </a:r>
-            <a:endParaRPr lang="en-US" sz="1300" dirty="0"/>
+            <a:endParaRPr lang="en-US" sz="1200" dirty="0"/>
           </a:p>
         </p:txBody>
       </p:sp>
@@ -8499,8 +9273,8 @@
         </p:nvSpPr>
         <p:spPr>
           <a:xfrm>
-            <a:off x="5440680" y="2578608"/>
-            <a:ext cx="3200400" cy="320040"/>
+            <a:off x="5349240" y="2386584"/>
+            <a:ext cx="3291840" cy="274320"/>
           </a:xfrm>
           <a:prstGeom prst="rect">
             <a:avLst/>
@@ -8516,7 +9290,7 @@
               <a:buNone/>
             </a:pPr>
             <a:r>
-              <a:rPr lang="en-US" sz="1000" dirty="0">
+              <a:rPr lang="en-US" sz="900" dirty="0">
                 <a:solidFill>
                   <a:srgbClr val="E8EDF2"/>
                 </a:solidFill>
@@ -8526,7 +9300,7 @@
               </a:rPr>
               <a:t>Reviewer must be a different person with reviewer/admin role</a:t>
             </a:r>
-            <a:endParaRPr lang="en-US" sz="1000" dirty="0"/>
+            <a:endParaRPr lang="en-US" sz="900" dirty="0"/>
           </a:p>
         </p:txBody>
       </p:sp>
@@ -8538,12 +9312,12 @@
         </p:nvSpPr>
         <p:spPr>
           <a:xfrm>
-            <a:off x="457200" y="3108960"/>
-            <a:ext cx="4114800" cy="777240"/>
+            <a:off x="457200" y="2834640"/>
+            <a:ext cx="4114800" cy="658368"/>
           </a:xfrm>
           <a:prstGeom prst="roundRect">
             <a:avLst>
-              <a:gd name="adj" fmla="val 9412"/>
+              <a:gd name="adj" fmla="val 11111"/>
             </a:avLst>
           </a:prstGeom>
           <a:solidFill>
@@ -8560,8 +9334,8 @@
         </p:nvSpPr>
         <p:spPr>
           <a:xfrm>
-            <a:off x="594360" y="3291840"/>
-            <a:ext cx="411480" cy="411480"/>
+            <a:off x="566928" y="2971800"/>
+            <a:ext cx="365760" cy="365760"/>
           </a:xfrm>
           <a:prstGeom prst="ellipse">
             <a:avLst/>
@@ -8580,8 +9354,8 @@
         </p:nvSpPr>
         <p:spPr>
           <a:xfrm>
-            <a:off x="594360" y="3291840"/>
-            <a:ext cx="411480" cy="411480"/>
+            <a:off x="566928" y="2971800"/>
+            <a:ext cx="365760" cy="365760"/>
           </a:xfrm>
           <a:prstGeom prst="rect">
             <a:avLst/>
@@ -8597,7 +9371,7 @@
               <a:buNone/>
             </a:pPr>
             <a:r>
-              <a:rPr lang="en-US" sz="1600" b="1" dirty="0">
+              <a:rPr lang="en-US" sz="1400" b="1" dirty="0">
                 <a:solidFill>
                   <a:srgbClr val="FFFFFF"/>
                 </a:solidFill>
@@ -8607,7 +9381,7 @@
               </a:rPr>
               <a:t>S</a:t>
             </a:r>
-            <a:endParaRPr lang="en-US" sz="1600" dirty="0"/>
+            <a:endParaRPr lang="en-US" sz="1400" dirty="0"/>
           </a:p>
         </p:txBody>
       </p:sp>
@@ -8619,8 +9393,8 @@
         </p:nvSpPr>
         <p:spPr>
           <a:xfrm>
-            <a:off x="1143000" y="3182112"/>
-            <a:ext cx="3200400" cy="320040"/>
+            <a:off x="1051560" y="2889504"/>
+            <a:ext cx="3291840" cy="274320"/>
           </a:xfrm>
           <a:prstGeom prst="rect">
             <a:avLst/>
@@ -8636,7 +9410,7 @@
               <a:buNone/>
             </a:pPr>
             <a:r>
-              <a:rPr lang="en-US" sz="1300" b="1" dirty="0">
+              <a:rPr lang="en-US" sz="1200" b="1" dirty="0">
                 <a:solidFill>
                   <a:srgbClr val="FFFFFF"/>
                 </a:solidFill>
@@ -8646,7 +9420,7 @@
               </a:rPr>
               <a:t>XSS Prevention</a:t>
             </a:r>
-            <a:endParaRPr lang="en-US" sz="1300" dirty="0"/>
+            <a:endParaRPr lang="en-US" sz="1200" dirty="0"/>
           </a:p>
         </p:txBody>
       </p:sp>
@@ -8658,8 +9432,8 @@
         </p:nvSpPr>
         <p:spPr>
           <a:xfrm>
-            <a:off x="1143000" y="3493008"/>
-            <a:ext cx="3200400" cy="320040"/>
+            <a:off x="1051560" y="3163824"/>
+            <a:ext cx="3291840" cy="274320"/>
           </a:xfrm>
           <a:prstGeom prst="rect">
             <a:avLst/>
@@ -8675,7 +9449,7 @@
               <a:buNone/>
             </a:pPr>
             <a:r>
-              <a:rPr lang="en-US" sz="1000" dirty="0">
+              <a:rPr lang="en-US" sz="900" dirty="0">
                 <a:solidFill>
                   <a:srgbClr val="E8EDF2"/>
                 </a:solidFill>
@@ -8685,7 +9459,7 @@
               </a:rPr>
               <a:t>All PDF-sourced strings HTML-escaped before rendering in the UI</a:t>
             </a:r>
-            <a:endParaRPr lang="en-US" sz="1000" dirty="0"/>
+            <a:endParaRPr lang="en-US" sz="900" dirty="0"/>
           </a:p>
         </p:txBody>
       </p:sp>
@@ -8697,12 +9471,12 @@
         </p:nvSpPr>
         <p:spPr>
           <a:xfrm>
-            <a:off x="4754880" y="3108960"/>
-            <a:ext cx="4114800" cy="777240"/>
+            <a:off x="4754880" y="2834640"/>
+            <a:ext cx="4114800" cy="658368"/>
           </a:xfrm>
           <a:prstGeom prst="roundRect">
             <a:avLst>
-              <a:gd name="adj" fmla="val 9412"/>
+              <a:gd name="adj" fmla="val 11111"/>
             </a:avLst>
           </a:prstGeom>
           <a:solidFill>
@@ -8719,8 +9493,8 @@
         </p:nvSpPr>
         <p:spPr>
           <a:xfrm>
-            <a:off x="4892040" y="3291840"/>
-            <a:ext cx="411480" cy="411480"/>
+            <a:off x="4864608" y="2971800"/>
+            <a:ext cx="365760" cy="365760"/>
           </a:xfrm>
           <a:prstGeom prst="ellipse">
             <a:avLst/>
@@ -8739,8 +9513,8 @@
         </p:nvSpPr>
         <p:spPr>
           <a:xfrm>
-            <a:off x="4892040" y="3291840"/>
-            <a:ext cx="411480" cy="411480"/>
+            <a:off x="4864608" y="2971800"/>
+            <a:ext cx="365760" cy="365760"/>
           </a:xfrm>
           <a:prstGeom prst="rect">
             <a:avLst/>
@@ -8756,7 +9530,7 @@
               <a:buNone/>
             </a:pPr>
             <a:r>
-              <a:rPr lang="en-US" sz="1600" b="1" dirty="0">
+              <a:rPr lang="en-US" sz="1400" b="1" dirty="0">
                 <a:solidFill>
                   <a:srgbClr val="FFFFFF"/>
                 </a:solidFill>
@@ -8766,7 +9540,7 @@
               </a:rPr>
               <a:t>S</a:t>
             </a:r>
-            <a:endParaRPr lang="en-US" sz="1600" dirty="0"/>
+            <a:endParaRPr lang="en-US" sz="1400" dirty="0"/>
           </a:p>
         </p:txBody>
       </p:sp>
@@ -8778,8 +9552,8 @@
         </p:nvSpPr>
         <p:spPr>
           <a:xfrm>
-            <a:off x="5440680" y="3182112"/>
-            <a:ext cx="3200400" cy="320040"/>
+            <a:off x="5349240" y="2889504"/>
+            <a:ext cx="3291840" cy="274320"/>
           </a:xfrm>
           <a:prstGeom prst="rect">
             <a:avLst/>
@@ -8795,7 +9569,7 @@
               <a:buNone/>
             </a:pPr>
             <a:r>
-              <a:rPr lang="en-US" sz="1300" b="1" dirty="0">
+              <a:rPr lang="en-US" sz="1200" b="1" dirty="0">
                 <a:solidFill>
                   <a:srgbClr val="FFFFFF"/>
                 </a:solidFill>
@@ -8803,9 +9577,9 @@
                 <a:ea typeface="Calibri" pitchFamily="34" charset="-122"/>
                 <a:cs typeface="Calibri" pitchFamily="34" charset="-120"/>
               </a:rPr>
-              <a:t>Zero-Amount Guard</a:t>
-            </a:r>
-            <a:endParaRPr lang="en-US" sz="1300" dirty="0"/>
+              <a:t>ML Anomaly Detection</a:t>
+            </a:r>
+            <a:endParaRPr lang="en-US" sz="1200" dirty="0"/>
           </a:p>
         </p:txBody>
       </p:sp>
@@ -8817,8 +9591,8 @@
         </p:nvSpPr>
         <p:spPr>
           <a:xfrm>
-            <a:off x="5440680" y="3493008"/>
-            <a:ext cx="3200400" cy="320040"/>
+            <a:off x="5349240" y="3163824"/>
+            <a:ext cx="3291840" cy="274320"/>
           </a:xfrm>
           <a:prstGeom prst="rect">
             <a:avLst/>
@@ -8834,7 +9608,7 @@
               <a:buNone/>
             </a:pPr>
             <a:r>
-              <a:rPr lang="en-US" sz="1000" dirty="0">
+              <a:rPr lang="en-US" sz="900" dirty="0">
                 <a:solidFill>
                   <a:srgbClr val="E8EDF2"/>
                 </a:solidFill>
@@ -8842,9 +9616,9 @@
                 <a:ea typeface="Calibri" pitchFamily="34" charset="-122"/>
                 <a:cs typeface="Calibri" pitchFamily="34" charset="-120"/>
               </a:rPr>
-              <a:t>Missing or unparseable amounts blocked from silent approval</a:t>
-            </a:r>
-            <a:endParaRPr lang="en-US" sz="1000" dirty="0"/>
+              <a:t>Z-score amount, timing interval, and frequency burst analysis</a:t>
+            </a:r>
+            <a:endParaRPr lang="en-US" sz="900" dirty="0"/>
           </a:p>
         </p:txBody>
       </p:sp>
@@ -8856,12 +9630,12 @@
         </p:nvSpPr>
         <p:spPr>
           <a:xfrm>
-            <a:off x="457200" y="4023360"/>
-            <a:ext cx="4114800" cy="777240"/>
+            <a:off x="457200" y="3611880"/>
+            <a:ext cx="4114800" cy="658368"/>
           </a:xfrm>
           <a:prstGeom prst="roundRect">
             <a:avLst>
-              <a:gd name="adj" fmla="val 9412"/>
+              <a:gd name="adj" fmla="val 11111"/>
             </a:avLst>
           </a:prstGeom>
           <a:solidFill>
@@ -8878,8 +9652,8 @@
         </p:nvSpPr>
         <p:spPr>
           <a:xfrm>
-            <a:off x="594360" y="4206240"/>
-            <a:ext cx="411480" cy="411480"/>
+            <a:off x="566928" y="3749040"/>
+            <a:ext cx="365760" cy="365760"/>
           </a:xfrm>
           <a:prstGeom prst="ellipse">
             <a:avLst/>
@@ -8898,8 +9672,8 @@
         </p:nvSpPr>
         <p:spPr>
           <a:xfrm>
-            <a:off x="594360" y="4206240"/>
-            <a:ext cx="411480" cy="411480"/>
+            <a:off x="566928" y="3749040"/>
+            <a:ext cx="365760" cy="365760"/>
           </a:xfrm>
           <a:prstGeom prst="rect">
             <a:avLst/>
@@ -8915,7 +9689,7 @@
               <a:buNone/>
             </a:pPr>
             <a:r>
-              <a:rPr lang="en-US" sz="1600" b="1" dirty="0">
+              <a:rPr lang="en-US" sz="1400" b="1" dirty="0">
                 <a:solidFill>
                   <a:srgbClr val="FFFFFF"/>
                 </a:solidFill>
@@ -8925,7 +9699,7 @@
               </a:rPr>
               <a:t>S</a:t>
             </a:r>
-            <a:endParaRPr lang="en-US" sz="1600" dirty="0"/>
+            <a:endParaRPr lang="en-US" sz="1400" dirty="0"/>
           </a:p>
         </p:txBody>
       </p:sp>
@@ -8937,8 +9711,8 @@
         </p:nvSpPr>
         <p:spPr>
           <a:xfrm>
-            <a:off x="1143000" y="4096512"/>
-            <a:ext cx="3200400" cy="320040"/>
+            <a:off x="1051560" y="3666744"/>
+            <a:ext cx="3291840" cy="274320"/>
           </a:xfrm>
           <a:prstGeom prst="rect">
             <a:avLst/>
@@ -8954,7 +9728,7 @@
               <a:buNone/>
             </a:pPr>
             <a:r>
-              <a:rPr lang="en-US" sz="1300" b="1" dirty="0">
+              <a:rPr lang="en-US" sz="1200" b="1" dirty="0">
                 <a:solidFill>
                   <a:srgbClr val="FFFFFF"/>
                 </a:solidFill>
@@ -8962,9 +9736,9 @@
                 <a:ea typeface="Calibri" pitchFamily="34" charset="-122"/>
                 <a:cs typeface="Calibri" pitchFamily="34" charset="-120"/>
               </a:rPr>
-              <a:t>Wire Change Audit</a:t>
-            </a:r>
-            <a:endParaRPr lang="en-US" sz="1300" dirty="0"/>
+              <a:t>Zero-Amount Guard</a:t>
+            </a:r>
+            <a:endParaRPr lang="en-US" sz="1200" dirty="0"/>
           </a:p>
         </p:txBody>
       </p:sp>
@@ -8976,8 +9750,8 @@
         </p:nvSpPr>
         <p:spPr>
           <a:xfrm>
-            <a:off x="1143000" y="4407408"/>
-            <a:ext cx="3200400" cy="320040"/>
+            <a:off x="1051560" y="3941064"/>
+            <a:ext cx="3291840" cy="274320"/>
           </a:xfrm>
           <a:prstGeom prst="rect">
             <a:avLst/>
@@ -8993,7 +9767,7 @@
               <a:buNone/>
             </a:pPr>
             <a:r>
-              <a:rPr lang="en-US" sz="1000" dirty="0">
+              <a:rPr lang="en-US" sz="900" dirty="0">
                 <a:solidFill>
                   <a:srgbClr val="E8EDF2"/>
                 </a:solidFill>
@@ -9001,9 +9775,9 @@
                 <a:ea typeface="Calibri" pitchFamily="34" charset="-122"/>
                 <a:cs typeface="Calibri" pitchFamily="34" charset="-120"/>
               </a:rPr>
-              <a:t>Dual-authorization workflow for any banking detail modifications</a:t>
-            </a:r>
-            <a:endParaRPr lang="en-US" sz="1000" dirty="0"/>
+              <a:t>Missing or unparseable amounts blocked from silent approval</a:t>
+            </a:r>
+            <a:endParaRPr lang="en-US" sz="900" dirty="0"/>
           </a:p>
         </p:txBody>
       </p:sp>
@@ -9015,12 +9789,12 @@
         </p:nvSpPr>
         <p:spPr>
           <a:xfrm>
-            <a:off x="4754880" y="4023360"/>
-            <a:ext cx="4114800" cy="777240"/>
+            <a:off x="4754880" y="3611880"/>
+            <a:ext cx="4114800" cy="658368"/>
           </a:xfrm>
           <a:prstGeom prst="roundRect">
             <a:avLst>
-              <a:gd name="adj" fmla="val 9412"/>
+              <a:gd name="adj" fmla="val 11111"/>
             </a:avLst>
           </a:prstGeom>
           <a:solidFill>
@@ -9037,8 +9811,8 @@
         </p:nvSpPr>
         <p:spPr>
           <a:xfrm>
-            <a:off x="4892040" y="4206240"/>
-            <a:ext cx="411480" cy="411480"/>
+            <a:off x="4864608" y="3749040"/>
+            <a:ext cx="365760" cy="365760"/>
           </a:xfrm>
           <a:prstGeom prst="ellipse">
             <a:avLst/>
@@ -9057,8 +9831,8 @@
         </p:nvSpPr>
         <p:spPr>
           <a:xfrm>
-            <a:off x="4892040" y="4206240"/>
-            <a:ext cx="411480" cy="411480"/>
+            <a:off x="4864608" y="3749040"/>
+            <a:ext cx="365760" cy="365760"/>
           </a:xfrm>
           <a:prstGeom prst="rect">
             <a:avLst/>
@@ -9074,7 +9848,7 @@
               <a:buNone/>
             </a:pPr>
             <a:r>
-              <a:rPr lang="en-US" sz="1600" b="1" dirty="0">
+              <a:rPr lang="en-US" sz="1400" b="1" dirty="0">
                 <a:solidFill>
                   <a:srgbClr val="FFFFFF"/>
                 </a:solidFill>
@@ -9084,7 +9858,7 @@
               </a:rPr>
               <a:t>S</a:t>
             </a:r>
-            <a:endParaRPr lang="en-US" sz="1600" dirty="0"/>
+            <a:endParaRPr lang="en-US" sz="1400" dirty="0"/>
           </a:p>
         </p:txBody>
       </p:sp>
@@ -9096,8 +9870,8 @@
         </p:nvSpPr>
         <p:spPr>
           <a:xfrm>
-            <a:off x="5440680" y="4096512"/>
-            <a:ext cx="3200400" cy="320040"/>
+            <a:off x="5349240" y="3666744"/>
+            <a:ext cx="3291840" cy="274320"/>
           </a:xfrm>
           <a:prstGeom prst="rect">
             <a:avLst/>
@@ -9113,7 +9887,7 @@
               <a:buNone/>
             </a:pPr>
             <a:r>
-              <a:rPr lang="en-US" sz="1300" b="1" dirty="0">
+              <a:rPr lang="en-US" sz="1200" b="1" dirty="0">
                 <a:solidFill>
                   <a:srgbClr val="FFFFFF"/>
                 </a:solidFill>
@@ -9121,22 +9895,181 @@
                 <a:ea typeface="Calibri" pitchFamily="34" charset="-122"/>
                 <a:cs typeface="Calibri" pitchFamily="34" charset="-120"/>
               </a:rPr>
+              <a:t>Wire Change Audit</a:t>
+            </a:r>
+            <a:endParaRPr lang="en-US" sz="1200" dirty="0"/>
+          </a:p>
+        </p:txBody>
+      </p:sp>
+      <p:sp>
+        <p:nvSpPr>
+          <p:cNvPr id="43" name="Text 40"/>
+          <p:cNvSpPr/>
+          <p:nvPr/>
+        </p:nvSpPr>
+        <p:spPr>
+          <a:xfrm>
+            <a:off x="5349240" y="3941064"/>
+            <a:ext cx="3291840" cy="274320"/>
+          </a:xfrm>
+          <a:prstGeom prst="rect">
+            <a:avLst/>
+          </a:prstGeom>
+          <a:noFill/>
+          <a:ln/>
+        </p:spPr>
+        <p:txBody>
+          <a:bodyPr wrap="square" lIns="0" tIns="0" rIns="0" bIns="0" rtlCol="0" anchor="ctr"/>
+          <a:lstStyle/>
+          <a:p>
+            <a:pPr indent="0" marL="0">
+              <a:buNone/>
+            </a:pPr>
+            <a:r>
+              <a:rPr lang="en-US" sz="900" dirty="0">
+                <a:solidFill>
+                  <a:srgbClr val="E8EDF2"/>
+                </a:solidFill>
+                <a:latin typeface="Calibri" pitchFamily="34" charset="0"/>
+                <a:ea typeface="Calibri" pitchFamily="34" charset="-122"/>
+                <a:cs typeface="Calibri" pitchFamily="34" charset="-120"/>
+              </a:rPr>
+              <a:t>Dual-authorization workflow for any banking detail modifications</a:t>
+            </a:r>
+            <a:endParaRPr lang="en-US" sz="900" dirty="0"/>
+          </a:p>
+        </p:txBody>
+      </p:sp>
+      <p:sp>
+        <p:nvSpPr>
+          <p:cNvPr id="44" name="Shape 41"/>
+          <p:cNvSpPr/>
+          <p:nvPr/>
+        </p:nvSpPr>
+        <p:spPr>
+          <a:xfrm>
+            <a:off x="457200" y="4389120"/>
+            <a:ext cx="4114800" cy="658368"/>
+          </a:xfrm>
+          <a:prstGeom prst="roundRect">
+            <a:avLst>
+              <a:gd name="adj" fmla="val 11111"/>
+            </a:avLst>
+          </a:prstGeom>
+          <a:solidFill>
+            <a:srgbClr val="132338"/>
+          </a:solidFill>
+          <a:ln/>
+        </p:spPr>
+      </p:sp>
+      <p:sp>
+        <p:nvSpPr>
+          <p:cNvPr id="45" name="Shape 42"/>
+          <p:cNvSpPr/>
+          <p:nvPr/>
+        </p:nvSpPr>
+        <p:spPr>
+          <a:xfrm>
+            <a:off x="566928" y="4526280"/>
+            <a:ext cx="365760" cy="365760"/>
+          </a:xfrm>
+          <a:prstGeom prst="ellipse">
+            <a:avLst/>
+          </a:prstGeom>
+          <a:solidFill>
+            <a:srgbClr val="27AE60"/>
+          </a:solidFill>
+          <a:ln/>
+        </p:spPr>
+      </p:sp>
+      <p:sp>
+        <p:nvSpPr>
+          <p:cNvPr id="46" name="Text 43"/>
+          <p:cNvSpPr/>
+          <p:nvPr/>
+        </p:nvSpPr>
+        <p:spPr>
+          <a:xfrm>
+            <a:off x="566928" y="4526280"/>
+            <a:ext cx="365760" cy="365760"/>
+          </a:xfrm>
+          <a:prstGeom prst="rect">
+            <a:avLst/>
+          </a:prstGeom>
+          <a:noFill/>
+          <a:ln/>
+        </p:spPr>
+        <p:txBody>
+          <a:bodyPr wrap="square" rtlCol="0" anchor="ctr"/>
+          <a:lstStyle/>
+          <a:p>
+            <a:pPr algn="ctr" indent="0" marL="0">
+              <a:buNone/>
+            </a:pPr>
+            <a:r>
+              <a:rPr lang="en-US" sz="1400" b="1" dirty="0">
+                <a:solidFill>
+                  <a:srgbClr val="FFFFFF"/>
+                </a:solidFill>
+                <a:latin typeface="Calibri" pitchFamily="34" charset="0"/>
+                <a:ea typeface="Calibri" pitchFamily="34" charset="-122"/>
+                <a:cs typeface="Calibri" pitchFamily="34" charset="-120"/>
+              </a:rPr>
+              <a:t>S</a:t>
+            </a:r>
+            <a:endParaRPr lang="en-US" sz="1400" dirty="0"/>
+          </a:p>
+        </p:txBody>
+      </p:sp>
+      <p:sp>
+        <p:nvSpPr>
+          <p:cNvPr id="47" name="Text 44"/>
+          <p:cNvSpPr/>
+          <p:nvPr/>
+        </p:nvSpPr>
+        <p:spPr>
+          <a:xfrm>
+            <a:off x="1051560" y="4443984"/>
+            <a:ext cx="3291840" cy="274320"/>
+          </a:xfrm>
+          <a:prstGeom prst="rect">
+            <a:avLst/>
+          </a:prstGeom>
+          <a:noFill/>
+          <a:ln/>
+        </p:spPr>
+        <p:txBody>
+          <a:bodyPr wrap="square" lIns="0" tIns="0" rIns="0" bIns="0" rtlCol="0" anchor="ctr"/>
+          <a:lstStyle/>
+          <a:p>
+            <a:pPr indent="0" marL="0">
+              <a:buNone/>
+            </a:pPr>
+            <a:r>
+              <a:rPr lang="en-US" sz="1200" b="1" dirty="0">
+                <a:solidFill>
+                  <a:srgbClr val="FFFFFF"/>
+                </a:solidFill>
+                <a:latin typeface="Calibri" pitchFamily="34" charset="0"/>
+                <a:ea typeface="Calibri" pitchFamily="34" charset="-122"/>
+                <a:cs typeface="Calibri" pitchFamily="34" charset="-120"/>
+              </a:rPr>
               <a:t>SMTP Isolation</a:t>
             </a:r>
-            <a:endParaRPr lang="en-US" sz="1300" dirty="0"/>
-          </a:p>
-        </p:txBody>
-      </p:sp>
-      <p:sp>
-        <p:nvSpPr>
-          <p:cNvPr id="43" name="Text 40"/>
-          <p:cNvSpPr/>
-          <p:nvPr/>
-        </p:nvSpPr>
-        <p:spPr>
-          <a:xfrm>
-            <a:off x="5440680" y="4407408"/>
-            <a:ext cx="3200400" cy="320040"/>
+            <a:endParaRPr lang="en-US" sz="1200" dirty="0"/>
+          </a:p>
+        </p:txBody>
+      </p:sp>
+      <p:sp>
+        <p:nvSpPr>
+          <p:cNvPr id="48" name="Text 45"/>
+          <p:cNvSpPr/>
+          <p:nvPr/>
+        </p:nvSpPr>
+        <p:spPr>
+          <a:xfrm>
+            <a:off x="1051560" y="4718304"/>
+            <a:ext cx="3291840" cy="274320"/>
           </a:xfrm>
           <a:prstGeom prst="rect">
             <a:avLst/>
@@ -9152,7 +10085,7 @@
               <a:buNone/>
             </a:pPr>
             <a:r>
-              <a:rPr lang="en-US" sz="1000" dirty="0">
+              <a:rPr lang="en-US" sz="900" dirty="0">
                 <a:solidFill>
                   <a:srgbClr val="E8EDF2"/>
                 </a:solidFill>
@@ -9162,7 +10095,7 @@
               </a:rPr>
               <a:t>Email passwords stored in session memory only, never persisted to DB</a:t>
             </a:r>
-            <a:endParaRPr lang="en-US" sz="1000" dirty="0"/>
+            <a:endParaRPr lang="en-US" sz="900" dirty="0"/>
           </a:p>
         </p:txBody>
       </p:sp>
@@ -10853,7 +11786,7 @@
                 <a:ea typeface="Calibri" pitchFamily="34" charset="-122"/>
                 <a:cs typeface="Calibri" pitchFamily="34" charset="-120"/>
               </a:rPr>
-              <a:t>SMTP email sending</a:t>
+              <a:t>Slack/Teams notifications</a:t>
             </a:r>
             <a:endParaRPr lang="en-US" sz="1200" dirty="0"/>
           </a:p>
@@ -10862,65 +11795,6 @@
       <p:sp>
         <p:nvSpPr>
           <p:cNvPr id="13" name="Shape 11"/>
-          <p:cNvSpPr/>
-          <p:nvPr/>
-        </p:nvSpPr>
-        <p:spPr>
-          <a:xfrm>
-            <a:off x="685800" y="4078224"/>
-            <a:ext cx="228600" cy="228600"/>
-          </a:xfrm>
-          <a:prstGeom prst="ellipse">
-            <a:avLst/>
-          </a:prstGeom>
-          <a:solidFill>
-            <a:srgbClr val="27AE60"/>
-          </a:solidFill>
-          <a:ln/>
-        </p:spPr>
-      </p:sp>
-      <p:sp>
-        <p:nvSpPr>
-          <p:cNvPr id="14" name="Text 12"/>
-          <p:cNvSpPr/>
-          <p:nvPr/>
-        </p:nvSpPr>
-        <p:spPr>
-          <a:xfrm>
-            <a:off x="1051560" y="4032504"/>
-            <a:ext cx="1920240" cy="320040"/>
-          </a:xfrm>
-          <a:prstGeom prst="rect">
-            <a:avLst/>
-          </a:prstGeom>
-          <a:noFill/>
-          <a:ln/>
-        </p:spPr>
-        <p:txBody>
-          <a:bodyPr wrap="square" lIns="0" tIns="0" rIns="0" bIns="0" rtlCol="0" anchor="ctr"/>
-          <a:lstStyle/>
-          <a:p>
-            <a:pPr indent="0" marL="0">
-              <a:buNone/>
-            </a:pPr>
-            <a:r>
-              <a:rPr lang="en-US" sz="1200" dirty="0">
-                <a:solidFill>
-                  <a:srgbClr val="1E3161"/>
-                </a:solidFill>
-                <a:latin typeface="Calibri" pitchFamily="34" charset="0"/>
-                <a:ea typeface="Calibri" pitchFamily="34" charset="-122"/>
-                <a:cs typeface="Calibri" pitchFamily="34" charset="-120"/>
-              </a:rPr>
-              <a:t>Excel export reports</a:t>
-            </a:r>
-            <a:endParaRPr lang="en-US" sz="1200" dirty="0"/>
-          </a:p>
-        </p:txBody>
-      </p:sp>
-      <p:sp>
-        <p:nvSpPr>
-          <p:cNvPr id="15" name="Shape 13"/>
           <p:cNvSpPr/>
           <p:nvPr/>
         </p:nvSpPr>
@@ -10954,7 +11828,7 @@
       </p:sp>
       <p:sp>
         <p:nvSpPr>
-          <p:cNvPr id="16" name="Shape 14"/>
+          <p:cNvPr id="14" name="Shape 12"/>
           <p:cNvSpPr/>
           <p:nvPr/>
         </p:nvSpPr>
@@ -10974,7 +11848,7 @@
       </p:sp>
       <p:sp>
         <p:nvSpPr>
-          <p:cNvPr id="17" name="Text 15"/>
+          <p:cNvPr id="15" name="Text 13"/>
           <p:cNvSpPr/>
           <p:nvPr/>
         </p:nvSpPr>
@@ -11013,7 +11887,7 @@
       </p:sp>
       <p:sp>
         <p:nvSpPr>
-          <p:cNvPr id="18" name="Shape 16"/>
+          <p:cNvPr id="16" name="Shape 14"/>
           <p:cNvSpPr/>
           <p:nvPr/>
         </p:nvSpPr>
@@ -11033,7 +11907,7 @@
       </p:sp>
       <p:sp>
         <p:nvSpPr>
-          <p:cNvPr id="19" name="Text 17"/>
+          <p:cNvPr id="17" name="Text 15"/>
           <p:cNvSpPr/>
           <p:nvPr/>
         </p:nvSpPr>
@@ -11072,7 +11946,7 @@
       </p:sp>
       <p:sp>
         <p:nvSpPr>
-          <p:cNvPr id="20" name="Shape 18"/>
+          <p:cNvPr id="18" name="Shape 16"/>
           <p:cNvSpPr/>
           <p:nvPr/>
         </p:nvSpPr>
@@ -11092,7 +11966,7 @@
       </p:sp>
       <p:sp>
         <p:nvSpPr>
-          <p:cNvPr id="21" name="Text 19"/>
+          <p:cNvPr id="19" name="Text 17"/>
           <p:cNvSpPr/>
           <p:nvPr/>
         </p:nvSpPr>
@@ -11123,7 +11997,7 @@
                 <a:ea typeface="Calibri" pitchFamily="34" charset="-122"/>
                 <a:cs typeface="Calibri" pitchFamily="34" charset="-120"/>
               </a:rPr>
-              <a:t>Cash position forecasting</a:t>
+              <a:t>GP Portal API integration</a:t>
             </a:r>
             <a:endParaRPr lang="en-US" sz="1200" dirty="0"/>
           </a:p>
@@ -11131,125 +12005,7 @@
       </p:sp>
       <p:sp>
         <p:nvSpPr>
-          <p:cNvPr id="22" name="Shape 20"/>
-          <p:cNvSpPr/>
-          <p:nvPr/>
-        </p:nvSpPr>
-        <p:spPr>
-          <a:xfrm>
-            <a:off x="3566160" y="3419856"/>
-            <a:ext cx="228600" cy="228600"/>
-          </a:xfrm>
-          <a:prstGeom prst="ellipse">
-            <a:avLst/>
-          </a:prstGeom>
-          <a:solidFill>
-            <a:srgbClr val="F39C12"/>
-          </a:solidFill>
-          <a:ln/>
-        </p:spPr>
-      </p:sp>
-      <p:sp>
-        <p:nvSpPr>
-          <p:cNvPr id="23" name="Text 21"/>
-          <p:cNvSpPr/>
-          <p:nvPr/>
-        </p:nvSpPr>
-        <p:spPr>
-          <a:xfrm>
-            <a:off x="3931920" y="3374136"/>
-            <a:ext cx="1920240" cy="320040"/>
-          </a:xfrm>
-          <a:prstGeom prst="rect">
-            <a:avLst/>
-          </a:prstGeom>
-          <a:noFill/>
-          <a:ln/>
-        </p:spPr>
-        <p:txBody>
-          <a:bodyPr wrap="square" lIns="0" tIns="0" rIns="0" bIns="0" rtlCol="0" anchor="ctr"/>
-          <a:lstStyle/>
-          <a:p>
-            <a:pPr indent="0" marL="0">
-              <a:buNone/>
-            </a:pPr>
-            <a:r>
-              <a:rPr lang="en-US" sz="1200" dirty="0">
-                <a:solidFill>
-                  <a:srgbClr val="1E3161"/>
-                </a:solidFill>
-                <a:latin typeface="Calibri" pitchFamily="34" charset="0"/>
-                <a:ea typeface="Calibri" pitchFamily="34" charset="-122"/>
-                <a:cs typeface="Calibri" pitchFamily="34" charset="-120"/>
-              </a:rPr>
-              <a:t>Slack/Teams notifications</a:t>
-            </a:r>
-            <a:endParaRPr lang="en-US" sz="1200" dirty="0"/>
-          </a:p>
-        </p:txBody>
-      </p:sp>
-      <p:sp>
-        <p:nvSpPr>
-          <p:cNvPr id="24" name="Shape 22"/>
-          <p:cNvSpPr/>
-          <p:nvPr/>
-        </p:nvSpPr>
-        <p:spPr>
-          <a:xfrm>
-            <a:off x="3566160" y="4078224"/>
-            <a:ext cx="228600" cy="228600"/>
-          </a:xfrm>
-          <a:prstGeom prst="ellipse">
-            <a:avLst/>
-          </a:prstGeom>
-          <a:solidFill>
-            <a:srgbClr val="F39C12"/>
-          </a:solidFill>
-          <a:ln/>
-        </p:spPr>
-      </p:sp>
-      <p:sp>
-        <p:nvSpPr>
-          <p:cNvPr id="25" name="Text 23"/>
-          <p:cNvSpPr/>
-          <p:nvPr/>
-        </p:nvSpPr>
-        <p:spPr>
-          <a:xfrm>
-            <a:off x="3931920" y="4032504"/>
-            <a:ext cx="1920240" cy="320040"/>
-          </a:xfrm>
-          <a:prstGeom prst="rect">
-            <a:avLst/>
-          </a:prstGeom>
-          <a:noFill/>
-          <a:ln/>
-        </p:spPr>
-        <p:txBody>
-          <a:bodyPr wrap="square" lIns="0" tIns="0" rIns="0" bIns="0" rtlCol="0" anchor="ctr"/>
-          <a:lstStyle/>
-          <a:p>
-            <a:pPr indent="0" marL="0">
-              <a:buNone/>
-            </a:pPr>
-            <a:r>
-              <a:rPr lang="en-US" sz="1200" dirty="0">
-                <a:solidFill>
-                  <a:srgbClr val="1E3161"/>
-                </a:solidFill>
-                <a:latin typeface="Calibri" pitchFamily="34" charset="0"/>
-                <a:ea typeface="Calibri" pitchFamily="34" charset="-122"/>
-                <a:cs typeface="Calibri" pitchFamily="34" charset="-120"/>
-              </a:rPr>
-              <a:t>Regulatory audit PDF export</a:t>
-            </a:r>
-            <a:endParaRPr lang="en-US" sz="1200" dirty="0"/>
-          </a:p>
-        </p:txBody>
-      </p:sp>
-      <p:sp>
-        <p:nvSpPr>
-          <p:cNvPr id="26" name="Shape 24"/>
+          <p:cNvPr id="20" name="Shape 18"/>
           <p:cNvSpPr/>
           <p:nvPr/>
         </p:nvSpPr>
@@ -11283,7 +12039,7 @@
       </p:sp>
       <p:sp>
         <p:nvSpPr>
-          <p:cNvPr id="27" name="Shape 25"/>
+          <p:cNvPr id="21" name="Shape 19"/>
           <p:cNvSpPr/>
           <p:nvPr/>
         </p:nvSpPr>
@@ -11303,7 +12059,7 @@
       </p:sp>
       <p:sp>
         <p:nvSpPr>
-          <p:cNvPr id="28" name="Text 26"/>
+          <p:cNvPr id="22" name="Text 20"/>
           <p:cNvSpPr/>
           <p:nvPr/>
         </p:nvSpPr>
@@ -11342,7 +12098,7 @@
       </p:sp>
       <p:sp>
         <p:nvSpPr>
-          <p:cNvPr id="29" name="Shape 27"/>
+          <p:cNvPr id="23" name="Shape 21"/>
           <p:cNvSpPr/>
           <p:nvPr/>
         </p:nvSpPr>
@@ -11362,7 +12118,7 @@
       </p:sp>
       <p:sp>
         <p:nvSpPr>
-          <p:cNvPr id="30" name="Text 28"/>
+          <p:cNvPr id="24" name="Text 22"/>
           <p:cNvSpPr/>
           <p:nvPr/>
         </p:nvSpPr>
@@ -11393,7 +12149,7 @@
                 <a:ea typeface="Calibri" pitchFamily="34" charset="-122"/>
                 <a:cs typeface="Calibri" pitchFamily="34" charset="-120"/>
               </a:rPr>
-              <a:t>GP Portal API integration</a:t>
+              <a:t>SWIFT MT103 generation</a:t>
             </a:r>
             <a:endParaRPr lang="en-US" sz="1200" dirty="0"/>
           </a:p>
@@ -11401,7 +12157,7 @@
       </p:sp>
       <p:sp>
         <p:nvSpPr>
-          <p:cNvPr id="31" name="Shape 29"/>
+          <p:cNvPr id="25" name="Shape 23"/>
           <p:cNvSpPr/>
           <p:nvPr/>
         </p:nvSpPr>
@@ -11421,131 +12177,13 @@
       </p:sp>
       <p:sp>
         <p:nvSpPr>
-          <p:cNvPr id="32" name="Text 30"/>
+          <p:cNvPr id="26" name="Text 24"/>
           <p:cNvSpPr/>
           <p:nvPr/>
         </p:nvSpPr>
         <p:spPr>
           <a:xfrm>
             <a:off x="6812280" y="2715768"/>
-            <a:ext cx="1920240" cy="320040"/>
-          </a:xfrm>
-          <a:prstGeom prst="rect">
-            <a:avLst/>
-          </a:prstGeom>
-          <a:noFill/>
-          <a:ln/>
-        </p:spPr>
-        <p:txBody>
-          <a:bodyPr wrap="square" lIns="0" tIns="0" rIns="0" bIns="0" rtlCol="0" anchor="ctr"/>
-          <a:lstStyle/>
-          <a:p>
-            <a:pPr indent="0" marL="0">
-              <a:buNone/>
-            </a:pPr>
-            <a:r>
-              <a:rPr lang="en-US" sz="1200" dirty="0">
-                <a:solidFill>
-                  <a:srgbClr val="1E3161"/>
-                </a:solidFill>
-                <a:latin typeface="Calibri" pitchFamily="34" charset="0"/>
-                <a:ea typeface="Calibri" pitchFamily="34" charset="-122"/>
-                <a:cs typeface="Calibri" pitchFamily="34" charset="-120"/>
-              </a:rPr>
-              <a:t>ML anomaly detection</a:t>
-            </a:r>
-            <a:endParaRPr lang="en-US" sz="1200" dirty="0"/>
-          </a:p>
-        </p:txBody>
-      </p:sp>
-      <p:sp>
-        <p:nvSpPr>
-          <p:cNvPr id="33" name="Shape 31"/>
-          <p:cNvSpPr/>
-          <p:nvPr/>
-        </p:nvSpPr>
-        <p:spPr>
-          <a:xfrm>
-            <a:off x="6446520" y="3419856"/>
-            <a:ext cx="228600" cy="228600"/>
-          </a:xfrm>
-          <a:prstGeom prst="ellipse">
-            <a:avLst/>
-          </a:prstGeom>
-          <a:solidFill>
-            <a:srgbClr val="1E3161"/>
-          </a:solidFill>
-          <a:ln/>
-        </p:spPr>
-      </p:sp>
-      <p:sp>
-        <p:nvSpPr>
-          <p:cNvPr id="34" name="Text 32"/>
-          <p:cNvSpPr/>
-          <p:nvPr/>
-        </p:nvSpPr>
-        <p:spPr>
-          <a:xfrm>
-            <a:off x="6812280" y="3374136"/>
-            <a:ext cx="1920240" cy="320040"/>
-          </a:xfrm>
-          <a:prstGeom prst="rect">
-            <a:avLst/>
-          </a:prstGeom>
-          <a:noFill/>
-          <a:ln/>
-        </p:spPr>
-        <p:txBody>
-          <a:bodyPr wrap="square" lIns="0" tIns="0" rIns="0" bIns="0" rtlCol="0" anchor="ctr"/>
-          <a:lstStyle/>
-          <a:p>
-            <a:pPr indent="0" marL="0">
-              <a:buNone/>
-            </a:pPr>
-            <a:r>
-              <a:rPr lang="en-US" sz="1200" dirty="0">
-                <a:solidFill>
-                  <a:srgbClr val="1E3161"/>
-                </a:solidFill>
-                <a:latin typeface="Calibri" pitchFamily="34" charset="0"/>
-                <a:ea typeface="Calibri" pitchFamily="34" charset="-122"/>
-                <a:cs typeface="Calibri" pitchFamily="34" charset="-120"/>
-              </a:rPr>
-              <a:t>SWIFT MT103 generation</a:t>
-            </a:r>
-            <a:endParaRPr lang="en-US" sz="1200" dirty="0"/>
-          </a:p>
-        </p:txBody>
-      </p:sp>
-      <p:sp>
-        <p:nvSpPr>
-          <p:cNvPr id="35" name="Shape 33"/>
-          <p:cNvSpPr/>
-          <p:nvPr/>
-        </p:nvSpPr>
-        <p:spPr>
-          <a:xfrm>
-            <a:off x="6446520" y="4078224"/>
-            <a:ext cx="228600" cy="228600"/>
-          </a:xfrm>
-          <a:prstGeom prst="ellipse">
-            <a:avLst/>
-          </a:prstGeom>
-          <a:solidFill>
-            <a:srgbClr val="1E3161"/>
-          </a:solidFill>
-          <a:ln/>
-        </p:spPr>
-      </p:sp>
-      <p:sp>
-        <p:nvSpPr>
-          <p:cNvPr id="36" name="Text 34"/>
-          <p:cNvSpPr/>
-          <p:nvPr/>
-        </p:nvSpPr>
-        <p:spPr>
-          <a:xfrm>
-            <a:off x="6812280" y="4032504"/>
             <a:ext cx="1920240" cy="320040"/>
           </a:xfrm>
           <a:prstGeom prst="rect">
@@ -12353,7 +12991,7 @@
                 <a:ea typeface="Georgia" pitchFamily="34" charset="-122"/>
                 <a:cs typeface="Georgia" pitchFamily="34" charset="-120"/>
               </a:rPr>
-              <a:t>15</a:t>
+              <a:t>18</a:t>
             </a:r>
             <a:endParaRPr lang="en-US" sz="3600" dirty="0"/>
           </a:p>
